--- a/Capstone Presentation.pptx
+++ b/Capstone Presentation.pptx
@@ -5,31 +5,35 @@
     <p:sldMasterId id="2147483648" r:id="rId1"/>
   </p:sldMasterIdLst>
   <p:notesMasterIdLst>
-    <p:notesMasterId r:id="rId12"/>
+    <p:notesMasterId r:id="rId13"/>
   </p:notesMasterIdLst>
   <p:sldIdLst>
     <p:sldId id="256" r:id="rId2"/>
-    <p:sldId id="257" r:id="rId3"/>
-    <p:sldId id="258" r:id="rId4"/>
-    <p:sldId id="259" r:id="rId5"/>
-    <p:sldId id="260" r:id="rId6"/>
-    <p:sldId id="261" r:id="rId7"/>
-    <p:sldId id="263" r:id="rId8"/>
-    <p:sldId id="262" r:id="rId9"/>
-    <p:sldId id="264" r:id="rId10"/>
-    <p:sldId id="265" r:id="rId11"/>
+    <p:sldId id="266" r:id="rId3"/>
+    <p:sldId id="267" r:id="rId4"/>
+    <p:sldId id="268" r:id="rId5"/>
+    <p:sldId id="259" r:id="rId6"/>
+    <p:sldId id="260" r:id="rId7"/>
+    <p:sldId id="261" r:id="rId8"/>
+    <p:sldId id="263" r:id="rId9"/>
+    <p:sldId id="262" r:id="rId10"/>
+    <p:sldId id="264" r:id="rId11"/>
+    <p:sldId id="265" r:id="rId12"/>
   </p:sldIdLst>
   <p:sldSz cx="14630400" cy="8229600"/>
   <p:notesSz cx="8229600" cy="14630400"/>
   <p:embeddedFontLst>
     <p:embeddedFont>
       <p:font typeface="Raleway" pitchFamily="2" charset="0"/>
-      <p:regular r:id="rId13"/>
+      <p:regular r:id="rId14"/>
+      <p:bold r:id="rId15"/>
+      <p:italic r:id="rId16"/>
+      <p:boldItalic r:id="rId17"/>
     </p:embeddedFont>
     <p:embeddedFont>
       <p:font typeface="Roboto" panose="02000000000000000000" pitchFamily="2" charset="0"/>
-      <p:regular r:id="rId14"/>
-      <p:bold r:id="rId15"/>
+      <p:regular r:id="rId18"/>
+      <p:bold r:id="rId19"/>
     </p:embeddedFont>
   </p:embeddedFontLst>
   <p:defaultTextStyle>
@@ -410,6 +414,90 @@
             <a:fld id="{F7021451-1387-4CA6-816F-3879F97B5CBC}" type="slidenum">
               <a:rPr lang="en-US"/>
               <a:t>10</a:t>
+            </a:fld>
+            <a:endParaRPr lang="en-US"/>
+          </a:p>
+        </p:txBody>
+      </p:sp>
+    </p:spTree>
+    <p:extLst>
+      <p:ext uri="{BB962C8B-B14F-4D97-AF65-F5344CB8AC3E}">
+        <p14:creationId xmlns:p14="http://schemas.microsoft.com/office/powerpoint/2010/main" val="1024086991"/>
+      </p:ext>
+    </p:extLst>
+  </p:cSld>
+  <p:clrMapOvr>
+    <a:masterClrMapping/>
+  </p:clrMapOvr>
+</p:notes>
+</file>
+
+<file path=ppt/notesSlides/notesSlide11.xml><?xml version="1.0" encoding="utf-8"?>
+<p:notes xmlns:a="http://schemas.openxmlformats.org/drawingml/2006/main" xmlns:r="http://schemas.openxmlformats.org/officeDocument/2006/relationships" xmlns:p="http://schemas.openxmlformats.org/presentationml/2006/main">
+  <p:cSld>
+    <p:spTree>
+      <p:nvGrpSpPr>
+        <p:cNvPr id="1" name=""/>
+        <p:cNvGrpSpPr/>
+        <p:nvPr/>
+      </p:nvGrpSpPr>
+      <p:grpSpPr>
+        <a:xfrm>
+          <a:off x="0" y="0"/>
+          <a:ext cx="0" cy="0"/>
+          <a:chOff x="0" y="0"/>
+          <a:chExt cx="0" cy="0"/>
+        </a:xfrm>
+      </p:grpSpPr>
+      <p:sp>
+        <p:nvSpPr>
+          <p:cNvPr id="2" name="Slide Image Placeholder 1"/>
+          <p:cNvSpPr>
+            <a:spLocks noGrp="1" noRot="1" noChangeAspect="1"/>
+          </p:cNvSpPr>
+          <p:nvPr>
+            <p:ph type="sldImg"/>
+          </p:nvPr>
+        </p:nvSpPr>
+        <p:spPr/>
+      </p:sp>
+      <p:sp>
+        <p:nvSpPr>
+          <p:cNvPr id="3" name="Notes Placeholder 2"/>
+          <p:cNvSpPr>
+            <a:spLocks noGrp="1"/>
+          </p:cNvSpPr>
+          <p:nvPr>
+            <p:ph type="body" idx="1"/>
+          </p:nvPr>
+        </p:nvSpPr>
+        <p:spPr/>
+        <p:txBody>
+          <a:bodyPr/>
+          <a:lstStyle/>
+          <a:p>
+            <a:endParaRPr lang="en-US" dirty="0"/>
+          </a:p>
+        </p:txBody>
+      </p:sp>
+      <p:sp>
+        <p:nvSpPr>
+          <p:cNvPr id="4" name="Slide Number Placeholder 3"/>
+          <p:cNvSpPr>
+            <a:spLocks noGrp="1"/>
+          </p:cNvSpPr>
+          <p:nvPr>
+            <p:ph type="sldNum" sz="quarter" idx="10"/>
+          </p:nvPr>
+        </p:nvSpPr>
+        <p:spPr/>
+        <p:txBody>
+          <a:bodyPr/>
+          <a:lstStyle/>
+          <a:p>
+            <a:fld id="{F7021451-1387-4CA6-816F-3879F97B5CBC}" type="slidenum">
+              <a:rPr lang="en-US"/>
+              <a:t>11</a:t>
             </a:fld>
             <a:endParaRPr lang="en-US"/>
           </a:p>
@@ -2405,7 +2493,7 @@
                 <a:ea typeface="Raleway" pitchFamily="34" charset="-122"/>
                 <a:cs typeface="Raleway" pitchFamily="34" charset="-120"/>
               </a:rPr>
-              <a:t>Predicting Sales Conversion Likelihood using Machine Learning</a:t>
+              <a:t>Predicting Lead Conversion Likelihood using Machine Learning</a:t>
             </a:r>
             <a:endParaRPr lang="en-US" sz="4450" dirty="0"/>
           </a:p>
@@ -2419,7 +2507,7 @@
         </p:nvSpPr>
         <p:spPr>
           <a:xfrm>
-            <a:off x="793790" y="4857512"/>
+            <a:off x="793790" y="4335898"/>
             <a:ext cx="7556421" cy="362903"/>
           </a:xfrm>
           <a:prstGeom prst="rect">
@@ -2448,48 +2536,6 @@
                 <a:cs typeface="Roboto" pitchFamily="34" charset="-120"/>
               </a:rPr>
               <a:t>AI-Driven Prioritization of Sales Leads</a:t>
-            </a:r>
-            <a:endParaRPr lang="en-US" sz="1750" dirty="0"/>
-          </a:p>
-        </p:txBody>
-      </p:sp>
-      <p:sp>
-        <p:nvSpPr>
-          <p:cNvPr id="5" name="Text 2"/>
-          <p:cNvSpPr/>
-          <p:nvPr/>
-        </p:nvSpPr>
-        <p:spPr>
-          <a:xfrm>
-            <a:off x="793790" y="5475565"/>
-            <a:ext cx="7556421" cy="362903"/>
-          </a:xfrm>
-          <a:prstGeom prst="rect">
-            <a:avLst/>
-          </a:prstGeom>
-          <a:noFill/>
-          <a:ln/>
-        </p:spPr>
-        <p:txBody>
-          <a:bodyPr wrap="none" lIns="0" tIns="0" rIns="0" bIns="0" rtlCol="0" anchor="t"/>
-          <a:lstStyle/>
-          <a:p>
-            <a:pPr marL="0" indent="0" algn="l">
-              <a:lnSpc>
-                <a:spcPts val="2850"/>
-              </a:lnSpc>
-              <a:buNone/>
-            </a:pPr>
-            <a:r>
-              <a:rPr lang="en-US" sz="1750" dirty="0">
-                <a:solidFill>
-                  <a:srgbClr val="3C3939"/>
-                </a:solidFill>
-                <a:latin typeface="Roboto" pitchFamily="34" charset="0"/>
-                <a:ea typeface="Roboto" pitchFamily="34" charset="-122"/>
-                <a:cs typeface="Roboto" pitchFamily="34" charset="-120"/>
-              </a:rPr>
-              <a:t>Presented by Subramanya Rithwik Jakka</a:t>
             </a:r>
             <a:endParaRPr lang="en-US" sz="1750" dirty="0"/>
           </a:p>
@@ -2534,6 +2580,802 @@
 </file>
 
 <file path=ppt/slides/slide10.xml><?xml version="1.0" encoding="utf-8"?>
+<p:sld xmlns:a="http://schemas.openxmlformats.org/drawingml/2006/main" xmlns:r="http://schemas.openxmlformats.org/officeDocument/2006/relationships" xmlns:p="http://schemas.openxmlformats.org/presentationml/2006/main">
+  <p:cSld name="Slide 9">
+    <p:spTree>
+      <p:nvGrpSpPr>
+        <p:cNvPr id="1" name=""/>
+        <p:cNvGrpSpPr/>
+        <p:nvPr/>
+      </p:nvGrpSpPr>
+      <p:grpSpPr>
+        <a:xfrm>
+          <a:off x="0" y="0"/>
+          <a:ext cx="0" cy="0"/>
+          <a:chOff x="0" y="0"/>
+          <a:chExt cx="0" cy="0"/>
+        </a:xfrm>
+      </p:grpSpPr>
+      <p:sp>
+        <p:nvSpPr>
+          <p:cNvPr id="2" name="Text 0"/>
+          <p:cNvSpPr/>
+          <p:nvPr/>
+        </p:nvSpPr>
+        <p:spPr>
+          <a:xfrm>
+            <a:off x="793790" y="1062871"/>
+            <a:ext cx="9202579" cy="708779"/>
+          </a:xfrm>
+          <a:prstGeom prst="rect">
+            <a:avLst/>
+          </a:prstGeom>
+          <a:noFill/>
+          <a:ln/>
+        </p:spPr>
+        <p:txBody>
+          <a:bodyPr wrap="none" lIns="0" tIns="0" rIns="0" bIns="0" rtlCol="0" anchor="t"/>
+          <a:lstStyle/>
+          <a:p>
+            <a:pPr marL="0" indent="0" algn="l">
+              <a:lnSpc>
+                <a:spcPts val="5550"/>
+              </a:lnSpc>
+              <a:buNone/>
+            </a:pPr>
+            <a:r>
+              <a:rPr lang="en-US" sz="4450" dirty="0">
+                <a:solidFill>
+                  <a:srgbClr val="1B1B27"/>
+                </a:solidFill>
+                <a:latin typeface="Raleway" pitchFamily="34" charset="0"/>
+                <a:ea typeface="Raleway" pitchFamily="34" charset="-122"/>
+                <a:cs typeface="Raleway" pitchFamily="34" charset="-120"/>
+              </a:rPr>
+              <a:t>Automated Monitoring &amp; Retraining</a:t>
+            </a:r>
+            <a:endParaRPr lang="en-US" sz="4450" dirty="0"/>
+          </a:p>
+        </p:txBody>
+      </p:sp>
+      <p:sp>
+        <p:nvSpPr>
+          <p:cNvPr id="3" name="Text 1"/>
+          <p:cNvSpPr/>
+          <p:nvPr/>
+        </p:nvSpPr>
+        <p:spPr>
+          <a:xfrm>
+            <a:off x="793790" y="2225278"/>
+            <a:ext cx="3898702" cy="708660"/>
+          </a:xfrm>
+          <a:prstGeom prst="rect">
+            <a:avLst/>
+          </a:prstGeom>
+          <a:noFill/>
+          <a:ln/>
+        </p:spPr>
+        <p:txBody>
+          <a:bodyPr wrap="square" lIns="0" tIns="0" rIns="0" bIns="0" rtlCol="0" anchor="t"/>
+          <a:lstStyle/>
+          <a:p>
+            <a:pPr marL="0" indent="0" algn="r">
+              <a:lnSpc>
+                <a:spcPts val="2750"/>
+              </a:lnSpc>
+              <a:buNone/>
+            </a:pPr>
+            <a:r>
+              <a:rPr lang="en-US" sz="2200" dirty="0">
+                <a:solidFill>
+                  <a:srgbClr val="3C3939"/>
+                </a:solidFill>
+                <a:latin typeface="Raleway" pitchFamily="34" charset="0"/>
+                <a:ea typeface="Raleway" pitchFamily="34" charset="-122"/>
+                <a:cs typeface="Raleway" pitchFamily="34" charset="-120"/>
+              </a:rPr>
+              <a:t>Drift Detection with Evidently AI</a:t>
+            </a:r>
+            <a:endParaRPr lang="en-US" sz="2200" dirty="0"/>
+          </a:p>
+        </p:txBody>
+      </p:sp>
+      <p:sp>
+        <p:nvSpPr>
+          <p:cNvPr id="4" name="Text 2"/>
+          <p:cNvSpPr/>
+          <p:nvPr/>
+        </p:nvSpPr>
+        <p:spPr>
+          <a:xfrm>
+            <a:off x="793790" y="3070027"/>
+            <a:ext cx="3898702" cy="1451610"/>
+          </a:xfrm>
+          <a:prstGeom prst="rect">
+            <a:avLst/>
+          </a:prstGeom>
+          <a:noFill/>
+          <a:ln/>
+        </p:spPr>
+        <p:txBody>
+          <a:bodyPr wrap="square" lIns="0" tIns="0" rIns="0" bIns="0" rtlCol="0" anchor="t"/>
+          <a:lstStyle/>
+          <a:p>
+            <a:pPr marL="0" indent="0" algn="r">
+              <a:lnSpc>
+                <a:spcPts val="2850"/>
+              </a:lnSpc>
+              <a:buNone/>
+            </a:pPr>
+            <a:r>
+              <a:rPr lang="en-US" sz="1750" dirty="0">
+                <a:solidFill>
+                  <a:srgbClr val="3C3939"/>
+                </a:solidFill>
+                <a:latin typeface="Roboto" pitchFamily="34" charset="0"/>
+                <a:ea typeface="Roboto" pitchFamily="34" charset="-122"/>
+                <a:cs typeface="Roboto" pitchFamily="34" charset="-120"/>
+              </a:rPr>
+              <a:t>We use </a:t>
+            </a:r>
+            <a:r>
+              <a:rPr lang="en-US" sz="1750" b="1" dirty="0">
+                <a:solidFill>
+                  <a:srgbClr val="3C3939"/>
+                </a:solidFill>
+                <a:latin typeface="Roboto" pitchFamily="34" charset="0"/>
+                <a:ea typeface="Roboto" pitchFamily="34" charset="-122"/>
+                <a:cs typeface="Roboto" pitchFamily="34" charset="-120"/>
+              </a:rPr>
+              <a:t>Evidently AI</a:t>
+            </a:r>
+            <a:r>
+              <a:rPr lang="en-US" sz="1750" dirty="0">
+                <a:solidFill>
+                  <a:srgbClr val="3C3939"/>
+                </a:solidFill>
+                <a:latin typeface="Roboto" pitchFamily="34" charset="0"/>
+                <a:ea typeface="Roboto" pitchFamily="34" charset="-122"/>
+                <a:cs typeface="Roboto" pitchFamily="34" charset="-120"/>
+              </a:rPr>
+              <a:t> to continuously monitor for </a:t>
+            </a:r>
+            <a:r>
+              <a:rPr lang="en-US" sz="1750" b="1" dirty="0">
+                <a:solidFill>
+                  <a:srgbClr val="3C3939"/>
+                </a:solidFill>
+                <a:latin typeface="Roboto" pitchFamily="34" charset="0"/>
+                <a:ea typeface="Roboto" pitchFamily="34" charset="-122"/>
+                <a:cs typeface="Roboto" pitchFamily="34" charset="-120"/>
+              </a:rPr>
+              <a:t>data and concept drift</a:t>
+            </a:r>
+            <a:r>
+              <a:rPr lang="en-US" sz="1750" dirty="0">
+                <a:solidFill>
+                  <a:srgbClr val="3C3939"/>
+                </a:solidFill>
+                <a:latin typeface="Roboto" pitchFamily="34" charset="0"/>
+                <a:ea typeface="Roboto" pitchFamily="34" charset="-122"/>
+                <a:cs typeface="Roboto" pitchFamily="34" charset="-120"/>
+              </a:rPr>
+              <a:t> by comparing new incoming data to the training dataset's characteristics.</a:t>
+            </a:r>
+            <a:endParaRPr lang="en-US" sz="1750" dirty="0"/>
+          </a:p>
+        </p:txBody>
+      </p:sp>
+      <p:pic>
+        <p:nvPicPr>
+          <p:cNvPr id="5" name="Image 0" descr="preencoded.png"/>
+          <p:cNvPicPr>
+            <a:picLocks noChangeAspect="1"/>
+          </p:cNvPicPr>
+          <p:nvPr/>
+        </p:nvPicPr>
+        <p:blipFill>
+          <a:blip r:embed="rId3"/>
+          <a:stretch>
+            <a:fillRect/>
+          </a:stretch>
+        </p:blipFill>
+        <p:spPr>
+          <a:xfrm>
+            <a:off x="5032653" y="2413516"/>
+            <a:ext cx="4564975" cy="4564975"/>
+          </a:xfrm>
+          <a:prstGeom prst="rect">
+            <a:avLst/>
+          </a:prstGeom>
+        </p:spPr>
+      </p:pic>
+      <p:sp>
+        <p:nvSpPr>
+          <p:cNvPr id="6" name="Text 3"/>
+          <p:cNvSpPr/>
+          <p:nvPr/>
+        </p:nvSpPr>
+        <p:spPr>
+          <a:xfrm>
+            <a:off x="6226731" y="3176588"/>
+            <a:ext cx="339328" cy="424220"/>
+          </a:xfrm>
+          <a:prstGeom prst="rect">
+            <a:avLst/>
+          </a:prstGeom>
+          <a:noFill/>
+          <a:ln/>
+        </p:spPr>
+        <p:txBody>
+          <a:bodyPr wrap="none" lIns="0" tIns="0" rIns="0" bIns="0" rtlCol="0" anchor="t"/>
+          <a:lstStyle/>
+          <a:p>
+            <a:pPr marL="0" indent="0" algn="l">
+              <a:lnSpc>
+                <a:spcPts val="4250"/>
+              </a:lnSpc>
+              <a:buNone/>
+            </a:pPr>
+            <a:r>
+              <a:rPr lang="en-US" sz="2650" dirty="0">
+                <a:solidFill>
+                  <a:srgbClr val="3C3939"/>
+                </a:solidFill>
+                <a:latin typeface="Raleway" pitchFamily="34" charset="0"/>
+                <a:ea typeface="Raleway" pitchFamily="34" charset="-122"/>
+                <a:cs typeface="Raleway" pitchFamily="34" charset="-120"/>
+              </a:rPr>
+              <a:t>1</a:t>
+            </a:r>
+            <a:endParaRPr lang="en-US" sz="2650" dirty="0"/>
+          </a:p>
+        </p:txBody>
+      </p:sp>
+      <p:sp>
+        <p:nvSpPr>
+          <p:cNvPr id="7" name="Text 4"/>
+          <p:cNvSpPr/>
+          <p:nvPr/>
+        </p:nvSpPr>
+        <p:spPr>
+          <a:xfrm>
+            <a:off x="9937790" y="2225278"/>
+            <a:ext cx="3898821" cy="708660"/>
+          </a:xfrm>
+          <a:prstGeom prst="rect">
+            <a:avLst/>
+          </a:prstGeom>
+          <a:noFill/>
+          <a:ln/>
+        </p:spPr>
+        <p:txBody>
+          <a:bodyPr wrap="square" lIns="0" tIns="0" rIns="0" bIns="0" rtlCol="0" anchor="t"/>
+          <a:lstStyle/>
+          <a:p>
+            <a:pPr marL="0" indent="0" algn="l">
+              <a:lnSpc>
+                <a:spcPts val="2750"/>
+              </a:lnSpc>
+              <a:buNone/>
+            </a:pPr>
+            <a:r>
+              <a:rPr lang="en-US" sz="2200" dirty="0">
+                <a:solidFill>
+                  <a:srgbClr val="3C3939"/>
+                </a:solidFill>
+                <a:latin typeface="Raleway" pitchFamily="34" charset="0"/>
+                <a:ea typeface="Raleway" pitchFamily="34" charset="-122"/>
+                <a:cs typeface="Raleway" pitchFamily="34" charset="-120"/>
+              </a:rPr>
+              <a:t>Airflow DAGs for Orchestration</a:t>
+            </a:r>
+            <a:endParaRPr lang="en-US" sz="2200" dirty="0"/>
+          </a:p>
+        </p:txBody>
+      </p:sp>
+      <p:sp>
+        <p:nvSpPr>
+          <p:cNvPr id="8" name="Text 5"/>
+          <p:cNvSpPr/>
+          <p:nvPr/>
+        </p:nvSpPr>
+        <p:spPr>
+          <a:xfrm>
+            <a:off x="9937790" y="3070027"/>
+            <a:ext cx="3898821" cy="1451610"/>
+          </a:xfrm>
+          <a:prstGeom prst="rect">
+            <a:avLst/>
+          </a:prstGeom>
+          <a:noFill/>
+          <a:ln/>
+        </p:spPr>
+        <p:txBody>
+          <a:bodyPr wrap="square" lIns="0" tIns="0" rIns="0" bIns="0" rtlCol="0" anchor="t"/>
+          <a:lstStyle/>
+          <a:p>
+            <a:pPr marL="0" indent="0" algn="l">
+              <a:lnSpc>
+                <a:spcPts val="2850"/>
+              </a:lnSpc>
+              <a:buNone/>
+            </a:pPr>
+            <a:r>
+              <a:rPr lang="en-US" sz="1750" b="1" dirty="0">
+                <a:solidFill>
+                  <a:srgbClr val="3C3939"/>
+                </a:solidFill>
+                <a:latin typeface="Roboto" pitchFamily="34" charset="0"/>
+                <a:ea typeface="Roboto" pitchFamily="34" charset="-122"/>
+                <a:cs typeface="Roboto" pitchFamily="34" charset="-120"/>
+              </a:rPr>
+              <a:t>Apache Airflow DAGs</a:t>
+            </a:r>
+            <a:r>
+              <a:rPr lang="en-US" sz="1750" dirty="0">
+                <a:solidFill>
+                  <a:srgbClr val="3C3939"/>
+                </a:solidFill>
+                <a:latin typeface="Roboto" pitchFamily="34" charset="0"/>
+                <a:ea typeface="Roboto" pitchFamily="34" charset="-122"/>
+                <a:cs typeface="Roboto" pitchFamily="34" charset="-120"/>
+              </a:rPr>
+              <a:t> (Directed Acyclic Graphs) are configured to automate the monitoring process and trigger subsequent actions.</a:t>
+            </a:r>
+            <a:endParaRPr lang="en-US" sz="1750" dirty="0"/>
+          </a:p>
+        </p:txBody>
+      </p:sp>
+      <p:pic>
+        <p:nvPicPr>
+          <p:cNvPr id="9" name="Image 1" descr="preencoded.png"/>
+          <p:cNvPicPr>
+            <a:picLocks noChangeAspect="1"/>
+          </p:cNvPicPr>
+          <p:nvPr/>
+        </p:nvPicPr>
+        <p:blipFill>
+          <a:blip r:embed="rId4"/>
+          <a:stretch>
+            <a:fillRect/>
+          </a:stretch>
+        </p:blipFill>
+        <p:spPr>
+          <a:xfrm>
+            <a:off x="5032653" y="2413516"/>
+            <a:ext cx="4564975" cy="4564975"/>
+          </a:xfrm>
+          <a:prstGeom prst="rect">
+            <a:avLst/>
+          </a:prstGeom>
+        </p:spPr>
+      </p:pic>
+      <p:sp>
+        <p:nvSpPr>
+          <p:cNvPr id="10" name="Text 6"/>
+          <p:cNvSpPr/>
+          <p:nvPr/>
+        </p:nvSpPr>
+        <p:spPr>
+          <a:xfrm>
+            <a:off x="8452604" y="3565088"/>
+            <a:ext cx="339328" cy="424220"/>
+          </a:xfrm>
+          <a:prstGeom prst="rect">
+            <a:avLst/>
+          </a:prstGeom>
+          <a:noFill/>
+          <a:ln/>
+        </p:spPr>
+        <p:txBody>
+          <a:bodyPr wrap="none" lIns="0" tIns="0" rIns="0" bIns="0" rtlCol="0" anchor="t"/>
+          <a:lstStyle/>
+          <a:p>
+            <a:pPr marL="0" indent="0" algn="l">
+              <a:lnSpc>
+                <a:spcPts val="4250"/>
+              </a:lnSpc>
+              <a:buNone/>
+            </a:pPr>
+            <a:r>
+              <a:rPr lang="en-US" sz="2650" dirty="0">
+                <a:solidFill>
+                  <a:srgbClr val="3C3939"/>
+                </a:solidFill>
+                <a:latin typeface="Raleway" pitchFamily="34" charset="0"/>
+                <a:ea typeface="Raleway" pitchFamily="34" charset="-122"/>
+                <a:cs typeface="Raleway" pitchFamily="34" charset="-120"/>
+              </a:rPr>
+              <a:t>2</a:t>
+            </a:r>
+            <a:endParaRPr lang="en-US" sz="2650" dirty="0"/>
+          </a:p>
+        </p:txBody>
+      </p:sp>
+      <p:sp>
+        <p:nvSpPr>
+          <p:cNvPr id="11" name="Text 7"/>
+          <p:cNvSpPr/>
+          <p:nvPr/>
+        </p:nvSpPr>
+        <p:spPr>
+          <a:xfrm>
+            <a:off x="9937790" y="5043249"/>
+            <a:ext cx="2874883" cy="354330"/>
+          </a:xfrm>
+          <a:prstGeom prst="rect">
+            <a:avLst/>
+          </a:prstGeom>
+          <a:noFill/>
+          <a:ln/>
+        </p:spPr>
+        <p:txBody>
+          <a:bodyPr wrap="none" lIns="0" tIns="0" rIns="0" bIns="0" rtlCol="0" anchor="t"/>
+          <a:lstStyle/>
+          <a:p>
+            <a:pPr marL="0" indent="0" algn="l">
+              <a:lnSpc>
+                <a:spcPts val="2750"/>
+              </a:lnSpc>
+              <a:buNone/>
+            </a:pPr>
+            <a:r>
+              <a:rPr lang="en-US" sz="2200" dirty="0">
+                <a:solidFill>
+                  <a:srgbClr val="3C3939"/>
+                </a:solidFill>
+                <a:latin typeface="Raleway" pitchFamily="34" charset="0"/>
+                <a:ea typeface="Raleway" pitchFamily="34" charset="-122"/>
+                <a:cs typeface="Raleway" pitchFamily="34" charset="-120"/>
+              </a:rPr>
+              <a:t>Conditional Retraining</a:t>
+            </a:r>
+            <a:endParaRPr lang="en-US" sz="2200" dirty="0"/>
+          </a:p>
+        </p:txBody>
+      </p:sp>
+      <p:sp>
+        <p:nvSpPr>
+          <p:cNvPr id="12" name="Text 8"/>
+          <p:cNvSpPr/>
+          <p:nvPr/>
+        </p:nvSpPr>
+        <p:spPr>
+          <a:xfrm>
+            <a:off x="9937790" y="5533668"/>
+            <a:ext cx="3898821" cy="1451610"/>
+          </a:xfrm>
+          <a:prstGeom prst="rect">
+            <a:avLst/>
+          </a:prstGeom>
+          <a:noFill/>
+          <a:ln/>
+        </p:spPr>
+        <p:txBody>
+          <a:bodyPr wrap="square" lIns="0" tIns="0" rIns="0" bIns="0" rtlCol="0" anchor="t"/>
+          <a:lstStyle/>
+          <a:p>
+            <a:pPr marL="0" indent="0" algn="l">
+              <a:lnSpc>
+                <a:spcPts val="2850"/>
+              </a:lnSpc>
+              <a:buNone/>
+            </a:pPr>
+            <a:r>
+              <a:rPr lang="en-US" sz="1750" dirty="0">
+                <a:solidFill>
+                  <a:srgbClr val="3C3939"/>
+                </a:solidFill>
+                <a:latin typeface="Roboto" pitchFamily="34" charset="0"/>
+                <a:ea typeface="Roboto" pitchFamily="34" charset="-122"/>
+                <a:cs typeface="Roboto" pitchFamily="34" charset="-120"/>
+              </a:rPr>
+              <a:t>If the detected drift </a:t>
+            </a:r>
+            <a:r>
+              <a:rPr lang="en-US" sz="1750" b="1" dirty="0">
+                <a:solidFill>
+                  <a:srgbClr val="3C3939"/>
+                </a:solidFill>
+                <a:latin typeface="Roboto" pitchFamily="34" charset="0"/>
+                <a:ea typeface="Roboto" pitchFamily="34" charset="-122"/>
+                <a:cs typeface="Roboto" pitchFamily="34" charset="-120"/>
+              </a:rPr>
+              <a:t>exceeds a predefined threshold</a:t>
+            </a:r>
+            <a:r>
+              <a:rPr lang="en-US" sz="1750" dirty="0">
+                <a:solidFill>
+                  <a:srgbClr val="3C3939"/>
+                </a:solidFill>
+                <a:latin typeface="Roboto" pitchFamily="34" charset="0"/>
+                <a:ea typeface="Roboto" pitchFamily="34" charset="-122"/>
+                <a:cs typeface="Roboto" pitchFamily="34" charset="-120"/>
+              </a:rPr>
+              <a:t>, the Airflow DAG automatically initiates the model retraining pipeline.</a:t>
+            </a:r>
+            <a:endParaRPr lang="en-US" sz="1750" dirty="0"/>
+          </a:p>
+        </p:txBody>
+      </p:sp>
+      <p:pic>
+        <p:nvPicPr>
+          <p:cNvPr id="13" name="Image 2" descr="preencoded.png"/>
+          <p:cNvPicPr>
+            <a:picLocks noChangeAspect="1"/>
+          </p:cNvPicPr>
+          <p:nvPr/>
+        </p:nvPicPr>
+        <p:blipFill>
+          <a:blip r:embed="rId5"/>
+          <a:stretch>
+            <a:fillRect/>
+          </a:stretch>
+        </p:blipFill>
+        <p:spPr>
+          <a:xfrm>
+            <a:off x="5032653" y="2413516"/>
+            <a:ext cx="4564975" cy="4564975"/>
+          </a:xfrm>
+          <a:prstGeom prst="rect">
+            <a:avLst/>
+          </a:prstGeom>
+        </p:spPr>
+      </p:pic>
+      <p:sp>
+        <p:nvSpPr>
+          <p:cNvPr id="14" name="Text 9"/>
+          <p:cNvSpPr/>
+          <p:nvPr/>
+        </p:nvSpPr>
+        <p:spPr>
+          <a:xfrm>
+            <a:off x="8064103" y="5790962"/>
+            <a:ext cx="339328" cy="424220"/>
+          </a:xfrm>
+          <a:prstGeom prst="rect">
+            <a:avLst/>
+          </a:prstGeom>
+          <a:noFill/>
+          <a:ln/>
+        </p:spPr>
+        <p:txBody>
+          <a:bodyPr wrap="none" lIns="0" tIns="0" rIns="0" bIns="0" rtlCol="0" anchor="t"/>
+          <a:lstStyle/>
+          <a:p>
+            <a:pPr marL="0" indent="0" algn="l">
+              <a:lnSpc>
+                <a:spcPts val="4250"/>
+              </a:lnSpc>
+              <a:buNone/>
+            </a:pPr>
+            <a:r>
+              <a:rPr lang="en-US" sz="2650" dirty="0">
+                <a:solidFill>
+                  <a:srgbClr val="3C3939"/>
+                </a:solidFill>
+                <a:latin typeface="Raleway" pitchFamily="34" charset="0"/>
+                <a:ea typeface="Raleway" pitchFamily="34" charset="-122"/>
+                <a:cs typeface="Raleway" pitchFamily="34" charset="-120"/>
+              </a:rPr>
+              <a:t>3</a:t>
+            </a:r>
+            <a:endParaRPr lang="en-US" sz="2650" dirty="0"/>
+          </a:p>
+        </p:txBody>
+      </p:sp>
+      <p:sp>
+        <p:nvSpPr>
+          <p:cNvPr id="15" name="Text 10"/>
+          <p:cNvSpPr/>
+          <p:nvPr/>
+        </p:nvSpPr>
+        <p:spPr>
+          <a:xfrm>
+            <a:off x="1205032" y="4861798"/>
+            <a:ext cx="3487460" cy="354330"/>
+          </a:xfrm>
+          <a:prstGeom prst="rect">
+            <a:avLst/>
+          </a:prstGeom>
+          <a:noFill/>
+          <a:ln/>
+        </p:spPr>
+        <p:txBody>
+          <a:bodyPr wrap="none" lIns="0" tIns="0" rIns="0" bIns="0" rtlCol="0" anchor="t"/>
+          <a:lstStyle/>
+          <a:p>
+            <a:pPr marL="0" indent="0" algn="r">
+              <a:lnSpc>
+                <a:spcPts val="2750"/>
+              </a:lnSpc>
+              <a:buNone/>
+            </a:pPr>
+            <a:r>
+              <a:rPr lang="en-US" sz="2200" dirty="0">
+                <a:solidFill>
+                  <a:srgbClr val="3C3939"/>
+                </a:solidFill>
+                <a:latin typeface="Raleway" pitchFamily="34" charset="0"/>
+                <a:ea typeface="Raleway" pitchFamily="34" charset="-122"/>
+                <a:cs typeface="Raleway" pitchFamily="34" charset="-120"/>
+              </a:rPr>
+              <a:t>Ensuring Model Relevance</a:t>
+            </a:r>
+            <a:endParaRPr lang="en-US" sz="2200" dirty="0"/>
+          </a:p>
+        </p:txBody>
+      </p:sp>
+      <p:sp>
+        <p:nvSpPr>
+          <p:cNvPr id="16" name="Text 11"/>
+          <p:cNvSpPr/>
+          <p:nvPr/>
+        </p:nvSpPr>
+        <p:spPr>
+          <a:xfrm>
+            <a:off x="793790" y="5352217"/>
+            <a:ext cx="3898702" cy="1814513"/>
+          </a:xfrm>
+          <a:prstGeom prst="rect">
+            <a:avLst/>
+          </a:prstGeom>
+          <a:noFill/>
+          <a:ln/>
+        </p:spPr>
+        <p:txBody>
+          <a:bodyPr wrap="square" lIns="0" tIns="0" rIns="0" bIns="0" rtlCol="0" anchor="t"/>
+          <a:lstStyle/>
+          <a:p>
+            <a:pPr marL="0" indent="0" algn="r">
+              <a:lnSpc>
+                <a:spcPts val="2850"/>
+              </a:lnSpc>
+              <a:buNone/>
+            </a:pPr>
+            <a:r>
+              <a:rPr lang="en-US" sz="1750" dirty="0">
+                <a:solidFill>
+                  <a:srgbClr val="3C3939"/>
+                </a:solidFill>
+                <a:latin typeface="Roboto" pitchFamily="34" charset="0"/>
+                <a:ea typeface="Roboto" pitchFamily="34" charset="-122"/>
+                <a:cs typeface="Roboto" pitchFamily="34" charset="-120"/>
+              </a:rPr>
+              <a:t>This automated system guarantees that our predictive model remains </a:t>
+            </a:r>
+            <a:r>
+              <a:rPr lang="en-US" sz="1750" b="1" dirty="0">
+                <a:solidFill>
+                  <a:srgbClr val="3C3939"/>
+                </a:solidFill>
+                <a:latin typeface="Roboto" pitchFamily="34" charset="0"/>
+                <a:ea typeface="Roboto" pitchFamily="34" charset="-122"/>
+                <a:cs typeface="Roboto" pitchFamily="34" charset="-120"/>
+              </a:rPr>
+              <a:t>accurate and relevant</a:t>
+            </a:r>
+            <a:r>
+              <a:rPr lang="en-US" sz="1750" dirty="0">
+                <a:solidFill>
+                  <a:srgbClr val="3C3939"/>
+                </a:solidFill>
+                <a:latin typeface="Roboto" pitchFamily="34" charset="0"/>
+                <a:ea typeface="Roboto" pitchFamily="34" charset="-122"/>
+                <a:cs typeface="Roboto" pitchFamily="34" charset="-120"/>
+              </a:rPr>
+              <a:t> as underlying lead behaviors and market conditions evolve.</a:t>
+            </a:r>
+            <a:endParaRPr lang="en-US" sz="1750" dirty="0"/>
+          </a:p>
+        </p:txBody>
+      </p:sp>
+      <p:pic>
+        <p:nvPicPr>
+          <p:cNvPr id="17" name="Image 3" descr="preencoded.png"/>
+          <p:cNvPicPr>
+            <a:picLocks noChangeAspect="1"/>
+          </p:cNvPicPr>
+          <p:nvPr/>
+        </p:nvPicPr>
+        <p:blipFill>
+          <a:blip r:embed="rId6"/>
+          <a:stretch>
+            <a:fillRect/>
+          </a:stretch>
+        </p:blipFill>
+        <p:spPr>
+          <a:xfrm>
+            <a:off x="5032653" y="2413516"/>
+            <a:ext cx="4564975" cy="4564975"/>
+          </a:xfrm>
+          <a:prstGeom prst="rect">
+            <a:avLst/>
+          </a:prstGeom>
+        </p:spPr>
+      </p:pic>
+      <p:sp>
+        <p:nvSpPr>
+          <p:cNvPr id="18" name="Text 12"/>
+          <p:cNvSpPr/>
+          <p:nvPr/>
+        </p:nvSpPr>
+        <p:spPr>
+          <a:xfrm>
+            <a:off x="5838230" y="5402461"/>
+            <a:ext cx="339328" cy="424220"/>
+          </a:xfrm>
+          <a:prstGeom prst="rect">
+            <a:avLst/>
+          </a:prstGeom>
+          <a:noFill/>
+          <a:ln/>
+        </p:spPr>
+        <p:txBody>
+          <a:bodyPr wrap="none" lIns="0" tIns="0" rIns="0" bIns="0" rtlCol="0" anchor="t"/>
+          <a:lstStyle/>
+          <a:p>
+            <a:pPr marL="0" indent="0" algn="l">
+              <a:lnSpc>
+                <a:spcPts val="4250"/>
+              </a:lnSpc>
+              <a:buNone/>
+            </a:pPr>
+            <a:r>
+              <a:rPr lang="en-US" sz="2650" dirty="0">
+                <a:solidFill>
+                  <a:srgbClr val="3C3939"/>
+                </a:solidFill>
+                <a:latin typeface="Raleway" pitchFamily="34" charset="0"/>
+                <a:ea typeface="Raleway" pitchFamily="34" charset="-122"/>
+                <a:cs typeface="Raleway" pitchFamily="34" charset="-120"/>
+              </a:rPr>
+              <a:t>4</a:t>
+            </a:r>
+            <a:endParaRPr lang="en-US" sz="2650" dirty="0"/>
+          </a:p>
+        </p:txBody>
+      </p:sp>
+      <p:pic>
+        <p:nvPicPr>
+          <p:cNvPr id="19" name="Picture 18">
+            <a:extLst>
+              <a:ext uri="{FF2B5EF4-FFF2-40B4-BE49-F238E27FC236}">
+                <a16:creationId xmlns:a16="http://schemas.microsoft.com/office/drawing/2014/main" id="{10A7490B-470D-78FE-3B8A-DCC6C4451E92}"/>
+              </a:ext>
+            </a:extLst>
+          </p:cNvPr>
+          <p:cNvPicPr>
+            <a:picLocks noChangeAspect="1"/>
+          </p:cNvPicPr>
+          <p:nvPr/>
+        </p:nvPicPr>
+        <p:blipFill>
+          <a:blip r:embed="rId7"/>
+          <a:stretch>
+            <a:fillRect/>
+          </a:stretch>
+        </p:blipFill>
+        <p:spPr>
+          <a:xfrm>
+            <a:off x="12316342" y="7790107"/>
+            <a:ext cx="2314058" cy="385676"/>
+          </a:xfrm>
+          <a:prstGeom prst="rect">
+            <a:avLst/>
+          </a:prstGeom>
+        </p:spPr>
+      </p:pic>
+    </p:spTree>
+  </p:cSld>
+  <p:clrMapOvr>
+    <a:masterClrMapping/>
+  </p:clrMapOvr>
+</p:sld>
+</file>
+
+<file path=ppt/slides/slide11.xml><?xml version="1.0" encoding="utf-8"?>
 <p:sld xmlns:a="http://schemas.openxmlformats.org/drawingml/2006/main" xmlns:r="http://schemas.openxmlformats.org/officeDocument/2006/relationships" xmlns:p="http://schemas.openxmlformats.org/presentationml/2006/main">
   <p:cSld name="Slide 10">
     <p:spTree>
@@ -2894,13 +3736,13 @@
       </p:sp>
       <p:sp>
         <p:nvSpPr>
-          <p:cNvPr id="9" name="Text 7"/>
-          <p:cNvSpPr/>
-          <p:nvPr/>
-        </p:nvSpPr>
-        <p:spPr>
-          <a:xfrm>
-            <a:off x="7599521" y="2942511"/>
+          <p:cNvPr id="10" name="Text 8"/>
+          <p:cNvSpPr/>
+          <p:nvPr/>
+        </p:nvSpPr>
+        <p:spPr>
+          <a:xfrm>
+            <a:off x="7591901" y="2968905"/>
             <a:ext cx="6244709" cy="725805"/>
           </a:xfrm>
           <a:prstGeom prst="rect">
@@ -2929,7 +3771,7 @@
                 <a:ea typeface="Roboto" pitchFamily="34" charset="-122"/>
                 <a:cs typeface="Roboto" pitchFamily="34" charset="-120"/>
               </a:rPr>
-              <a:t>Real-time API Integration:</a:t>
+              <a:t>Lead Profile Enrichment:</a:t>
             </a:r>
             <a:r>
               <a:rPr lang="en-US" sz="1750" dirty="0">
@@ -2940,7 +3782,7 @@
                 <a:ea typeface="Roboto" pitchFamily="34" charset="-122"/>
                 <a:cs typeface="Roboto" pitchFamily="34" charset="-120"/>
               </a:rPr>
-              <a:t> Provide instant predictions for immediate sales actions.</a:t>
+              <a:t> Incorporate external data sources for deeper insights.</a:t>
             </a:r>
             <a:endParaRPr lang="en-US" sz="1750" dirty="0"/>
           </a:p>
@@ -2948,13 +3790,13 @@
       </p:sp>
       <p:sp>
         <p:nvSpPr>
-          <p:cNvPr id="10" name="Text 8"/>
-          <p:cNvSpPr/>
-          <p:nvPr/>
-        </p:nvSpPr>
-        <p:spPr>
-          <a:xfrm>
-            <a:off x="7599521" y="3747611"/>
+          <p:cNvPr id="11" name="Text 9"/>
+          <p:cNvSpPr/>
+          <p:nvPr/>
+        </p:nvSpPr>
+        <p:spPr>
+          <a:xfrm>
+            <a:off x="7599521" y="3772652"/>
             <a:ext cx="6244709" cy="725805"/>
           </a:xfrm>
           <a:prstGeom prst="rect">
@@ -2983,7 +3825,7 @@
                 <a:ea typeface="Roboto" pitchFamily="34" charset="-122"/>
                 <a:cs typeface="Roboto" pitchFamily="34" charset="-120"/>
               </a:rPr>
-              <a:t>Lead Profile Enrichment:</a:t>
+              <a:t>Uplift Modeling:</a:t>
             </a:r>
             <a:r>
               <a:rPr lang="en-US" sz="1750" dirty="0">
@@ -2994,7 +3836,7 @@
                 <a:ea typeface="Roboto" pitchFamily="34" charset="-122"/>
                 <a:cs typeface="Roboto" pitchFamily="34" charset="-120"/>
               </a:rPr>
-              <a:t> Incorporate external data sources for deeper insights.</a:t>
+              <a:t> Predict the incremental impact of interventions on conversion.</a:t>
             </a:r>
             <a:endParaRPr lang="en-US" sz="1750" dirty="0"/>
           </a:p>
@@ -3002,67 +3844,13 @@
       </p:sp>
       <p:sp>
         <p:nvSpPr>
-          <p:cNvPr id="11" name="Text 9"/>
-          <p:cNvSpPr/>
-          <p:nvPr/>
-        </p:nvSpPr>
-        <p:spPr>
-          <a:xfrm>
-            <a:off x="7599521" y="4552712"/>
-            <a:ext cx="6244709" cy="725805"/>
-          </a:xfrm>
-          <a:prstGeom prst="rect">
-            <a:avLst/>
-          </a:prstGeom>
-          <a:noFill/>
-          <a:ln/>
-        </p:spPr>
-        <p:txBody>
-          <a:bodyPr wrap="square" lIns="0" tIns="0" rIns="0" bIns="0" rtlCol="0" anchor="t"/>
-          <a:lstStyle/>
-          <a:p>
-            <a:pPr marL="342900" indent="-342900" algn="l">
-              <a:lnSpc>
-                <a:spcPts val="2850"/>
-              </a:lnSpc>
-              <a:buSzPct val="100000"/>
-              <a:buChar char="•"/>
-            </a:pPr>
-            <a:r>
-              <a:rPr lang="en-US" sz="1750" b="1" dirty="0">
-                <a:solidFill>
-                  <a:srgbClr val="3C3939"/>
-                </a:solidFill>
-                <a:latin typeface="Roboto" pitchFamily="34" charset="0"/>
-                <a:ea typeface="Roboto" pitchFamily="34" charset="-122"/>
-                <a:cs typeface="Roboto" pitchFamily="34" charset="-120"/>
-              </a:rPr>
-              <a:t>Uplift Modeling:</a:t>
-            </a:r>
-            <a:r>
-              <a:rPr lang="en-US" sz="1750" dirty="0">
-                <a:solidFill>
-                  <a:srgbClr val="3C3939"/>
-                </a:solidFill>
-                <a:latin typeface="Roboto" pitchFamily="34" charset="0"/>
-                <a:ea typeface="Roboto" pitchFamily="34" charset="-122"/>
-                <a:cs typeface="Roboto" pitchFamily="34" charset="-120"/>
-              </a:rPr>
-              <a:t> Predict the incremental impact of interventions on conversion.</a:t>
-            </a:r>
-            <a:endParaRPr lang="en-US" sz="1750" dirty="0"/>
-          </a:p>
-        </p:txBody>
-      </p:sp>
-      <p:sp>
-        <p:nvSpPr>
           <p:cNvPr id="12" name="Text 10"/>
           <p:cNvSpPr/>
           <p:nvPr/>
         </p:nvSpPr>
         <p:spPr>
           <a:xfrm>
-            <a:off x="7599521" y="5357813"/>
+            <a:off x="7591900" y="4642413"/>
             <a:ext cx="6244709" cy="725805"/>
           </a:xfrm>
           <a:prstGeom prst="rect">
@@ -3201,7 +3989,7 @@
 
 <file path=ppt/slides/slide2.xml><?xml version="1.0" encoding="utf-8"?>
 <p:sld xmlns:a="http://schemas.openxmlformats.org/drawingml/2006/main" xmlns:r="http://schemas.openxmlformats.org/officeDocument/2006/relationships" xmlns:p="http://schemas.openxmlformats.org/presentationml/2006/main">
-  <p:cSld name="Slide 2">
+  <p:cSld>
     <p:spTree>
       <p:nvGrpSpPr>
         <p:cNvPr id="1" name=""/>
@@ -3224,8 +4012,8 @@
         </p:nvSpPr>
         <p:spPr>
           <a:xfrm>
-            <a:off x="793790" y="1756053"/>
-            <a:ext cx="13042821" cy="1417558"/>
+            <a:off x="621268" y="488156"/>
+            <a:ext cx="4437936" cy="554593"/>
           </a:xfrm>
           <a:prstGeom prst="rect">
             <a:avLst/>
@@ -3234,17 +4022,17 @@
           <a:ln/>
         </p:spPr>
         <p:txBody>
-          <a:bodyPr wrap="square" lIns="0" tIns="0" rIns="0" bIns="0" rtlCol="0" anchor="t"/>
+          <a:bodyPr wrap="none" lIns="0" tIns="0" rIns="0" bIns="0" rtlCol="0" anchor="t"/>
           <a:lstStyle/>
           <a:p>
             <a:pPr marL="0" indent="0" algn="l">
               <a:lnSpc>
-                <a:spcPts val="5550"/>
+                <a:spcPts val="4350"/>
               </a:lnSpc>
               <a:buNone/>
             </a:pPr>
             <a:r>
-              <a:rPr lang="en-US" sz="4450" dirty="0">
+              <a:rPr lang="en-US" sz="3450" dirty="0">
                 <a:solidFill>
                   <a:srgbClr val="1B1B27"/>
                 </a:solidFill>
@@ -3252,22 +4040,56 @@
                 <a:ea typeface="Raleway" pitchFamily="34" charset="-122"/>
                 <a:cs typeface="Raleway" pitchFamily="34" charset="-120"/>
               </a:rPr>
-              <a:t>The Business Challenge: Inefficient Sales Prioritization</a:t>
-            </a:r>
-            <a:endParaRPr lang="en-US" sz="4450" dirty="0"/>
-          </a:p>
-        </p:txBody>
-      </p:sp>
-      <p:sp>
-        <p:nvSpPr>
-          <p:cNvPr id="3" name="Text 1"/>
-          <p:cNvSpPr/>
-          <p:nvPr/>
-        </p:nvSpPr>
-        <p:spPr>
-          <a:xfrm>
-            <a:off x="793790" y="3627239"/>
-            <a:ext cx="13042821" cy="725805"/>
+              <a:t>Presentation Agenda</a:t>
+            </a:r>
+            <a:endParaRPr lang="en-US" sz="3450" dirty="0"/>
+          </a:p>
+        </p:txBody>
+      </p:sp>
+      <p:sp>
+        <p:nvSpPr>
+          <p:cNvPr id="3" name="Shape 1"/>
+          <p:cNvSpPr/>
+          <p:nvPr/>
+        </p:nvSpPr>
+        <p:spPr>
+          <a:xfrm>
+            <a:off x="621268" y="1308973"/>
+            <a:ext cx="399336" cy="399336"/>
+          </a:xfrm>
+          <a:prstGeom prst="roundRect">
+            <a:avLst>
+              <a:gd name="adj" fmla="val 18670"/>
+            </a:avLst>
+          </a:prstGeom>
+          <a:solidFill>
+            <a:srgbClr val="E1E1EA"/>
+          </a:solidFill>
+          <a:ln w="7620">
+            <a:solidFill>
+              <a:srgbClr val="C7C7D0"/>
+            </a:solidFill>
+            <a:prstDash val="solid"/>
+          </a:ln>
+        </p:spPr>
+        <p:txBody>
+          <a:bodyPr/>
+          <a:lstStyle/>
+          <a:p>
+            <a:endParaRPr lang="en-IN"/>
+          </a:p>
+        </p:txBody>
+      </p:sp>
+      <p:sp>
+        <p:nvSpPr>
+          <p:cNvPr id="4" name="Text 2"/>
+          <p:cNvSpPr/>
+          <p:nvPr/>
+        </p:nvSpPr>
+        <p:spPr>
+          <a:xfrm>
+            <a:off x="687824" y="1342251"/>
+            <a:ext cx="266224" cy="332780"/>
           </a:xfrm>
           <a:prstGeom prst="rect">
             <a:avLst/>
@@ -3276,62 +4098,116 @@
           <a:ln/>
         </p:spPr>
         <p:txBody>
-          <a:bodyPr wrap="square" lIns="0" tIns="0" rIns="0" bIns="0" rtlCol="0" anchor="t"/>
+          <a:bodyPr wrap="none" lIns="0" tIns="0" rIns="0" bIns="0" rtlCol="0" anchor="t"/>
+          <a:lstStyle/>
+          <a:p>
+            <a:pPr marL="0" indent="0" algn="ctr">
+              <a:lnSpc>
+                <a:spcPts val="2050"/>
+              </a:lnSpc>
+              <a:buNone/>
+            </a:pPr>
+            <a:r>
+              <a:rPr lang="en-US" sz="2050" dirty="0">
+                <a:solidFill>
+                  <a:srgbClr val="3C3939"/>
+                </a:solidFill>
+                <a:latin typeface="Raleway" pitchFamily="34" charset="0"/>
+                <a:ea typeface="Raleway" pitchFamily="34" charset="-122"/>
+                <a:cs typeface="Raleway" pitchFamily="34" charset="-120"/>
+              </a:rPr>
+              <a:t>1</a:t>
+            </a:r>
+            <a:endParaRPr lang="en-US" sz="2050" dirty="0"/>
+          </a:p>
+        </p:txBody>
+      </p:sp>
+      <p:sp>
+        <p:nvSpPr>
+          <p:cNvPr id="5" name="Text 3"/>
+          <p:cNvSpPr/>
+          <p:nvPr/>
+        </p:nvSpPr>
+        <p:spPr>
+          <a:xfrm>
+            <a:off x="1198007" y="1369933"/>
+            <a:ext cx="5827157" cy="277416"/>
+          </a:xfrm>
+          <a:prstGeom prst="rect">
+            <a:avLst/>
+          </a:prstGeom>
+          <a:noFill/>
+          <a:ln/>
+        </p:spPr>
+        <p:txBody>
+          <a:bodyPr wrap="none" lIns="0" tIns="0" rIns="0" bIns="0" rtlCol="0" anchor="t"/>
           <a:lstStyle/>
           <a:p>
             <a:pPr marL="0" indent="0" algn="l">
               <a:lnSpc>
-                <a:spcPts val="2850"/>
+                <a:spcPts val="2150"/>
               </a:lnSpc>
               <a:buNone/>
             </a:pPr>
             <a:r>
-              <a:rPr lang="en-US" sz="1750" dirty="0">
-                <a:solidFill>
-                  <a:srgbClr val="3C3939"/>
-                </a:solidFill>
-                <a:latin typeface="Roboto" pitchFamily="34" charset="0"/>
-                <a:ea typeface="Roboto" pitchFamily="34" charset="-122"/>
-                <a:cs typeface="Roboto" pitchFamily="34" charset="-120"/>
-              </a:rPr>
-              <a:t>The company B2B sales cycle often faces </a:t>
-            </a:r>
-            <a:r>
-              <a:rPr lang="en-US" sz="1750" b="1" dirty="0">
-                <a:solidFill>
-                  <a:srgbClr val="3C3939"/>
-                </a:solidFill>
-                <a:latin typeface="Roboto" pitchFamily="34" charset="0"/>
-                <a:ea typeface="Roboto" pitchFamily="34" charset="-122"/>
-                <a:cs typeface="Roboto" pitchFamily="34" charset="-120"/>
-              </a:rPr>
-              <a:t>inefficiency due to significant lead drop-off</a:t>
-            </a:r>
-            <a:r>
-              <a:rPr lang="en-US" sz="1750" dirty="0">
-                <a:solidFill>
-                  <a:srgbClr val="3C3939"/>
-                </a:solidFill>
-                <a:latin typeface="Roboto" pitchFamily="34" charset="0"/>
-                <a:ea typeface="Roboto" pitchFamily="34" charset="-122"/>
-                <a:cs typeface="Roboto" pitchFamily="34" charset="-120"/>
-              </a:rPr>
-              <a:t>. Without an intelligent prioritization mechanism, sales teams spend valuable time on leads with low conversion potential, leading to:</a:t>
-            </a:r>
-            <a:endParaRPr lang="en-US" sz="1750" dirty="0"/>
-          </a:p>
-        </p:txBody>
-      </p:sp>
-      <p:sp>
-        <p:nvSpPr>
-          <p:cNvPr id="4" name="Text 2"/>
-          <p:cNvSpPr/>
-          <p:nvPr/>
-        </p:nvSpPr>
-        <p:spPr>
-          <a:xfrm>
-            <a:off x="793790" y="4608195"/>
-            <a:ext cx="13042821" cy="362903"/>
+              <a:rPr lang="en-US" sz="1700" dirty="0">
+                <a:solidFill>
+                  <a:srgbClr val="3C3939"/>
+                </a:solidFill>
+                <a:latin typeface="Raleway" pitchFamily="34" charset="0"/>
+                <a:ea typeface="Raleway" pitchFamily="34" charset="-122"/>
+                <a:cs typeface="Raleway" pitchFamily="34" charset="-120"/>
+              </a:rPr>
+              <a:t>The Business Problem: Inefficient Sales Prioritization and Objective </a:t>
+            </a:r>
+            <a:endParaRPr lang="en-US" sz="1700" dirty="0"/>
+          </a:p>
+        </p:txBody>
+      </p:sp>
+      <p:sp>
+        <p:nvSpPr>
+          <p:cNvPr id="6" name="Shape 4"/>
+          <p:cNvSpPr/>
+          <p:nvPr/>
+        </p:nvSpPr>
+        <p:spPr>
+          <a:xfrm>
+            <a:off x="621268" y="2063234"/>
+            <a:ext cx="399336" cy="399336"/>
+          </a:xfrm>
+          <a:prstGeom prst="roundRect">
+            <a:avLst>
+              <a:gd name="adj" fmla="val 18670"/>
+            </a:avLst>
+          </a:prstGeom>
+          <a:solidFill>
+            <a:srgbClr val="E1E1EA"/>
+          </a:solidFill>
+          <a:ln w="7620">
+            <a:solidFill>
+              <a:srgbClr val="C7C7D0"/>
+            </a:solidFill>
+            <a:prstDash val="solid"/>
+          </a:ln>
+        </p:spPr>
+        <p:txBody>
+          <a:bodyPr/>
+          <a:lstStyle/>
+          <a:p>
+            <a:endParaRPr lang="en-IN"/>
+          </a:p>
+        </p:txBody>
+      </p:sp>
+      <p:sp>
+        <p:nvSpPr>
+          <p:cNvPr id="7" name="Text 5"/>
+          <p:cNvSpPr/>
+          <p:nvPr/>
+        </p:nvSpPr>
+        <p:spPr>
+          <a:xfrm>
+            <a:off x="687824" y="2096512"/>
+            <a:ext cx="266224" cy="332780"/>
           </a:xfrm>
           <a:prstGeom prst="rect">
             <a:avLst/>
@@ -3343,38 +4219,37 @@
           <a:bodyPr wrap="none" lIns="0" tIns="0" rIns="0" bIns="0" rtlCol="0" anchor="t"/>
           <a:lstStyle/>
           <a:p>
-            <a:pPr marL="342900" indent="-342900" algn="l">
-              <a:lnSpc>
-                <a:spcPts val="2850"/>
-              </a:lnSpc>
-              <a:buSzPct val="100000"/>
-              <a:buChar char="•"/>
-            </a:pPr>
-            <a:r>
-              <a:rPr lang="en-US" sz="1750" dirty="0">
-                <a:solidFill>
-                  <a:srgbClr val="3C3939"/>
-                </a:solidFill>
-                <a:latin typeface="Roboto" pitchFamily="34" charset="0"/>
-                <a:ea typeface="Roboto" pitchFamily="34" charset="-122"/>
-                <a:cs typeface="Roboto" pitchFamily="34" charset="-120"/>
-              </a:rPr>
-              <a:t>Suboptimal resource allocation</a:t>
-            </a:r>
-            <a:endParaRPr lang="en-US" sz="1750" dirty="0"/>
-          </a:p>
-        </p:txBody>
-      </p:sp>
-      <p:sp>
-        <p:nvSpPr>
-          <p:cNvPr id="5" name="Text 3"/>
-          <p:cNvSpPr/>
-          <p:nvPr/>
-        </p:nvSpPr>
-        <p:spPr>
-          <a:xfrm>
-            <a:off x="793790" y="5050393"/>
-            <a:ext cx="13042821" cy="362903"/>
+            <a:pPr marL="0" indent="0" algn="ctr">
+              <a:lnSpc>
+                <a:spcPts val="2050"/>
+              </a:lnSpc>
+              <a:buNone/>
+            </a:pPr>
+            <a:r>
+              <a:rPr lang="en-US" sz="2050" dirty="0">
+                <a:solidFill>
+                  <a:srgbClr val="3C3939"/>
+                </a:solidFill>
+                <a:latin typeface="Raleway" pitchFamily="34" charset="0"/>
+                <a:ea typeface="Raleway" pitchFamily="34" charset="-122"/>
+                <a:cs typeface="Raleway" pitchFamily="34" charset="-120"/>
+              </a:rPr>
+              <a:t>2</a:t>
+            </a:r>
+            <a:endParaRPr lang="en-US" sz="2050" dirty="0"/>
+          </a:p>
+        </p:txBody>
+      </p:sp>
+      <p:sp>
+        <p:nvSpPr>
+          <p:cNvPr id="8" name="Text 6"/>
+          <p:cNvSpPr/>
+          <p:nvPr/>
+        </p:nvSpPr>
+        <p:spPr>
+          <a:xfrm>
+            <a:off x="1198007" y="2124194"/>
+            <a:ext cx="3069550" cy="277416"/>
           </a:xfrm>
           <a:prstGeom prst="rect">
             <a:avLst/>
@@ -3386,38 +4261,71 @@
           <a:bodyPr wrap="none" lIns="0" tIns="0" rIns="0" bIns="0" rtlCol="0" anchor="t"/>
           <a:lstStyle/>
           <a:p>
-            <a:pPr marL="342900" indent="-342900" algn="l">
-              <a:lnSpc>
-                <a:spcPts val="2850"/>
-              </a:lnSpc>
-              <a:buSzPct val="100000"/>
-              <a:buChar char="•"/>
-            </a:pPr>
-            <a:r>
-              <a:rPr lang="en-US" sz="1750" dirty="0">
-                <a:solidFill>
-                  <a:srgbClr val="3C3939"/>
-                </a:solidFill>
-                <a:latin typeface="Roboto" pitchFamily="34" charset="0"/>
-                <a:ea typeface="Roboto" pitchFamily="34" charset="-122"/>
-                <a:cs typeface="Roboto" pitchFamily="34" charset="-120"/>
-              </a:rPr>
-              <a:t>Reduced sales productivity</a:t>
-            </a:r>
-            <a:endParaRPr lang="en-US" sz="1750" dirty="0"/>
-          </a:p>
-        </p:txBody>
-      </p:sp>
-      <p:sp>
-        <p:nvSpPr>
-          <p:cNvPr id="6" name="Text 4"/>
-          <p:cNvSpPr/>
-          <p:nvPr/>
-        </p:nvSpPr>
-        <p:spPr>
-          <a:xfrm>
-            <a:off x="793790" y="5492591"/>
-            <a:ext cx="13042821" cy="362903"/>
+            <a:pPr marL="0" indent="0" algn="l">
+              <a:lnSpc>
+                <a:spcPts val="2150"/>
+              </a:lnSpc>
+              <a:buNone/>
+            </a:pPr>
+            <a:r>
+              <a:rPr lang="en-US" sz="1700" dirty="0">
+                <a:solidFill>
+                  <a:srgbClr val="3C3939"/>
+                </a:solidFill>
+                <a:latin typeface="Raleway" pitchFamily="34" charset="0"/>
+                <a:ea typeface="Raleway" pitchFamily="34" charset="-122"/>
+                <a:cs typeface="Raleway" pitchFamily="34" charset="-120"/>
+              </a:rPr>
+              <a:t>Project Scope &amp; Methodology</a:t>
+            </a:r>
+            <a:endParaRPr lang="en-US" sz="1700" dirty="0"/>
+          </a:p>
+        </p:txBody>
+      </p:sp>
+      <p:sp>
+        <p:nvSpPr>
+          <p:cNvPr id="9" name="Shape 7"/>
+          <p:cNvSpPr/>
+          <p:nvPr/>
+        </p:nvSpPr>
+        <p:spPr>
+          <a:xfrm>
+            <a:off x="621268" y="2817495"/>
+            <a:ext cx="399336" cy="399336"/>
+          </a:xfrm>
+          <a:prstGeom prst="roundRect">
+            <a:avLst>
+              <a:gd name="adj" fmla="val 18670"/>
+            </a:avLst>
+          </a:prstGeom>
+          <a:solidFill>
+            <a:srgbClr val="E1E1EA"/>
+          </a:solidFill>
+          <a:ln w="7620">
+            <a:solidFill>
+              <a:srgbClr val="C7C7D0"/>
+            </a:solidFill>
+            <a:prstDash val="solid"/>
+          </a:ln>
+        </p:spPr>
+        <p:txBody>
+          <a:bodyPr/>
+          <a:lstStyle/>
+          <a:p>
+            <a:endParaRPr lang="en-IN"/>
+          </a:p>
+        </p:txBody>
+      </p:sp>
+      <p:sp>
+        <p:nvSpPr>
+          <p:cNvPr id="10" name="Text 8"/>
+          <p:cNvSpPr/>
+          <p:nvPr/>
+        </p:nvSpPr>
+        <p:spPr>
+          <a:xfrm>
+            <a:off x="687824" y="2850773"/>
+            <a:ext cx="266224" cy="332780"/>
           </a:xfrm>
           <a:prstGeom prst="rect">
             <a:avLst/>
@@ -3429,38 +4337,37 @@
           <a:bodyPr wrap="none" lIns="0" tIns="0" rIns="0" bIns="0" rtlCol="0" anchor="t"/>
           <a:lstStyle/>
           <a:p>
-            <a:pPr marL="342900" indent="-342900" algn="l">
-              <a:lnSpc>
-                <a:spcPts val="2850"/>
-              </a:lnSpc>
-              <a:buSzPct val="100000"/>
-              <a:buChar char="•"/>
-            </a:pPr>
-            <a:r>
-              <a:rPr lang="en-US" sz="1750" dirty="0">
-                <a:solidFill>
-                  <a:srgbClr val="3C3939"/>
-                </a:solidFill>
-                <a:latin typeface="Roboto" pitchFamily="34" charset="0"/>
-                <a:ea typeface="Roboto" pitchFamily="34" charset="-122"/>
-                <a:cs typeface="Roboto" pitchFamily="34" charset="-120"/>
-              </a:rPr>
-              <a:t>Missed opportunities for high-potential leads</a:t>
-            </a:r>
-            <a:endParaRPr lang="en-US" sz="1750" dirty="0"/>
-          </a:p>
-        </p:txBody>
-      </p:sp>
-      <p:sp>
-        <p:nvSpPr>
-          <p:cNvPr id="7" name="Text 5"/>
-          <p:cNvSpPr/>
-          <p:nvPr/>
-        </p:nvSpPr>
-        <p:spPr>
-          <a:xfrm>
-            <a:off x="793790" y="6110645"/>
-            <a:ext cx="13042821" cy="362903"/>
+            <a:pPr marL="0" indent="0" algn="ctr">
+              <a:lnSpc>
+                <a:spcPts val="2050"/>
+              </a:lnSpc>
+              <a:buNone/>
+            </a:pPr>
+            <a:r>
+              <a:rPr lang="en-US" sz="2050" dirty="0">
+                <a:solidFill>
+                  <a:srgbClr val="3C3939"/>
+                </a:solidFill>
+                <a:latin typeface="Raleway" pitchFamily="34" charset="0"/>
+                <a:ea typeface="Raleway" pitchFamily="34" charset="-122"/>
+                <a:cs typeface="Raleway" pitchFamily="34" charset="-120"/>
+              </a:rPr>
+              <a:t>3</a:t>
+            </a:r>
+            <a:endParaRPr lang="en-US" sz="2050" dirty="0"/>
+          </a:p>
+        </p:txBody>
+      </p:sp>
+      <p:sp>
+        <p:nvSpPr>
+          <p:cNvPr id="11" name="Text 9"/>
+          <p:cNvSpPr/>
+          <p:nvPr/>
+        </p:nvSpPr>
+        <p:spPr>
+          <a:xfrm>
+            <a:off x="1198007" y="2878455"/>
+            <a:ext cx="4896803" cy="277416"/>
           </a:xfrm>
           <a:prstGeom prst="rect">
             <a:avLst/>
@@ -3474,53 +4381,737 @@
           <a:p>
             <a:pPr marL="0" indent="0" algn="l">
               <a:lnSpc>
-                <a:spcPts val="2850"/>
+                <a:spcPts val="2150"/>
               </a:lnSpc>
               <a:buNone/>
             </a:pPr>
             <a:r>
-              <a:rPr lang="en-US" sz="1750" dirty="0">
-                <a:solidFill>
-                  <a:srgbClr val="3C3939"/>
-                </a:solidFill>
-                <a:latin typeface="Roboto" pitchFamily="34" charset="0"/>
-                <a:ea typeface="Roboto" pitchFamily="34" charset="-122"/>
-                <a:cs typeface="Roboto" pitchFamily="34" charset="-120"/>
-              </a:rPr>
-              <a:t>Our objective is to leverage data to </a:t>
-            </a:r>
-            <a:r>
-              <a:rPr lang="en-US" sz="1750" b="1" dirty="0">
-                <a:solidFill>
-                  <a:srgbClr val="3C3939"/>
-                </a:solidFill>
-                <a:latin typeface="Roboto" pitchFamily="34" charset="0"/>
-                <a:ea typeface="Roboto" pitchFamily="34" charset="-122"/>
-                <a:cs typeface="Roboto" pitchFamily="34" charset="-120"/>
-              </a:rPr>
-              <a:t>improve ROI and focus our sales efforts</a:t>
-            </a:r>
-            <a:r>
-              <a:rPr lang="en-US" sz="1750" dirty="0">
-                <a:solidFill>
-                  <a:srgbClr val="3C3939"/>
-                </a:solidFill>
-                <a:latin typeface="Roboto" pitchFamily="34" charset="0"/>
-                <a:ea typeface="Roboto" pitchFamily="34" charset="-122"/>
-                <a:cs typeface="Roboto" pitchFamily="34" charset="-120"/>
-              </a:rPr>
-              <a:t> more effectively.</a:t>
-            </a:r>
-            <a:endParaRPr lang="en-US" sz="1750" dirty="0"/>
+              <a:rPr lang="en-US" sz="1700" dirty="0">
+                <a:solidFill>
+                  <a:srgbClr val="3C3939"/>
+                </a:solidFill>
+                <a:latin typeface="Raleway" pitchFamily="34" charset="0"/>
+                <a:ea typeface="Raleway" pitchFamily="34" charset="-122"/>
+                <a:cs typeface="Raleway" pitchFamily="34" charset="-120"/>
+              </a:rPr>
+              <a:t>Dataset Overview</a:t>
+            </a:r>
+            <a:endParaRPr lang="en-US" sz="1700" dirty="0"/>
+          </a:p>
+        </p:txBody>
+      </p:sp>
+      <p:sp>
+        <p:nvSpPr>
+          <p:cNvPr id="12" name="Shape 10"/>
+          <p:cNvSpPr/>
+          <p:nvPr/>
+        </p:nvSpPr>
+        <p:spPr>
+          <a:xfrm>
+            <a:off x="621268" y="3571756"/>
+            <a:ext cx="399336" cy="399336"/>
+          </a:xfrm>
+          <a:prstGeom prst="roundRect">
+            <a:avLst>
+              <a:gd name="adj" fmla="val 18670"/>
+            </a:avLst>
+          </a:prstGeom>
+          <a:solidFill>
+            <a:srgbClr val="E1E1EA"/>
+          </a:solidFill>
+          <a:ln w="7620">
+            <a:solidFill>
+              <a:srgbClr val="C7C7D0"/>
+            </a:solidFill>
+            <a:prstDash val="solid"/>
+          </a:ln>
+        </p:spPr>
+        <p:txBody>
+          <a:bodyPr/>
+          <a:lstStyle/>
+          <a:p>
+            <a:endParaRPr lang="en-IN"/>
+          </a:p>
+        </p:txBody>
+      </p:sp>
+      <p:sp>
+        <p:nvSpPr>
+          <p:cNvPr id="13" name="Text 11"/>
+          <p:cNvSpPr/>
+          <p:nvPr/>
+        </p:nvSpPr>
+        <p:spPr>
+          <a:xfrm>
+            <a:off x="687824" y="3605034"/>
+            <a:ext cx="266224" cy="332780"/>
+          </a:xfrm>
+          <a:prstGeom prst="rect">
+            <a:avLst/>
+          </a:prstGeom>
+          <a:noFill/>
+          <a:ln/>
+        </p:spPr>
+        <p:txBody>
+          <a:bodyPr wrap="none" lIns="0" tIns="0" rIns="0" bIns="0" rtlCol="0" anchor="t"/>
+          <a:lstStyle/>
+          <a:p>
+            <a:pPr marL="0" indent="0" algn="ctr">
+              <a:lnSpc>
+                <a:spcPts val="2050"/>
+              </a:lnSpc>
+              <a:buNone/>
+            </a:pPr>
+            <a:r>
+              <a:rPr lang="en-US" sz="2050" dirty="0">
+                <a:solidFill>
+                  <a:srgbClr val="3C3939"/>
+                </a:solidFill>
+                <a:latin typeface="Raleway" pitchFamily="34" charset="0"/>
+                <a:ea typeface="Raleway" pitchFamily="34" charset="-122"/>
+                <a:cs typeface="Raleway" pitchFamily="34" charset="-120"/>
+              </a:rPr>
+              <a:t>4</a:t>
+            </a:r>
+            <a:endParaRPr lang="en-US" sz="2050" dirty="0"/>
+          </a:p>
+        </p:txBody>
+      </p:sp>
+      <p:sp>
+        <p:nvSpPr>
+          <p:cNvPr id="14" name="Text 12"/>
+          <p:cNvSpPr/>
+          <p:nvPr/>
+        </p:nvSpPr>
+        <p:spPr>
+          <a:xfrm>
+            <a:off x="1198007" y="3632716"/>
+            <a:ext cx="4327922" cy="277416"/>
+          </a:xfrm>
+          <a:prstGeom prst="rect">
+            <a:avLst/>
+          </a:prstGeom>
+          <a:noFill/>
+          <a:ln/>
+        </p:spPr>
+        <p:txBody>
+          <a:bodyPr wrap="none" lIns="0" tIns="0" rIns="0" bIns="0" rtlCol="0" anchor="t"/>
+          <a:lstStyle/>
+          <a:p>
+            <a:pPr marL="0" indent="0" algn="l">
+              <a:lnSpc>
+                <a:spcPts val="2150"/>
+              </a:lnSpc>
+              <a:buNone/>
+            </a:pPr>
+            <a:r>
+              <a:rPr lang="en-US" sz="1700" dirty="0">
+                <a:solidFill>
+                  <a:srgbClr val="3C3939"/>
+                </a:solidFill>
+                <a:latin typeface="Raleway" pitchFamily="34" charset="0"/>
+                <a:ea typeface="Raleway" pitchFamily="34" charset="-122"/>
+                <a:cs typeface="Raleway" pitchFamily="34" charset="-120"/>
+              </a:rPr>
+              <a:t>Data Preparation Techniques</a:t>
+            </a:r>
+            <a:endParaRPr lang="en-US" sz="1700" dirty="0"/>
+          </a:p>
+        </p:txBody>
+      </p:sp>
+      <p:sp>
+        <p:nvSpPr>
+          <p:cNvPr id="15" name="Shape 13"/>
+          <p:cNvSpPr/>
+          <p:nvPr/>
+        </p:nvSpPr>
+        <p:spPr>
+          <a:xfrm>
+            <a:off x="621268" y="4326017"/>
+            <a:ext cx="399336" cy="399336"/>
+          </a:xfrm>
+          <a:prstGeom prst="roundRect">
+            <a:avLst>
+              <a:gd name="adj" fmla="val 18670"/>
+            </a:avLst>
+          </a:prstGeom>
+          <a:solidFill>
+            <a:srgbClr val="E1E1EA"/>
+          </a:solidFill>
+          <a:ln w="7620">
+            <a:solidFill>
+              <a:srgbClr val="C7C7D0"/>
+            </a:solidFill>
+            <a:prstDash val="solid"/>
+          </a:ln>
+        </p:spPr>
+        <p:txBody>
+          <a:bodyPr/>
+          <a:lstStyle/>
+          <a:p>
+            <a:endParaRPr lang="en-IN"/>
+          </a:p>
+        </p:txBody>
+      </p:sp>
+      <p:sp>
+        <p:nvSpPr>
+          <p:cNvPr id="16" name="Text 14"/>
+          <p:cNvSpPr/>
+          <p:nvPr/>
+        </p:nvSpPr>
+        <p:spPr>
+          <a:xfrm>
+            <a:off x="687824" y="4359295"/>
+            <a:ext cx="266224" cy="332780"/>
+          </a:xfrm>
+          <a:prstGeom prst="rect">
+            <a:avLst/>
+          </a:prstGeom>
+          <a:noFill/>
+          <a:ln/>
+        </p:spPr>
+        <p:txBody>
+          <a:bodyPr wrap="none" lIns="0" tIns="0" rIns="0" bIns="0" rtlCol="0" anchor="t"/>
+          <a:lstStyle/>
+          <a:p>
+            <a:pPr marL="0" indent="0" algn="ctr">
+              <a:lnSpc>
+                <a:spcPts val="2050"/>
+              </a:lnSpc>
+              <a:buNone/>
+            </a:pPr>
+            <a:r>
+              <a:rPr lang="en-US" sz="2050" dirty="0">
+                <a:solidFill>
+                  <a:srgbClr val="3C3939"/>
+                </a:solidFill>
+                <a:latin typeface="Raleway" pitchFamily="34" charset="0"/>
+                <a:ea typeface="Raleway" pitchFamily="34" charset="-122"/>
+                <a:cs typeface="Raleway" pitchFamily="34" charset="-120"/>
+              </a:rPr>
+              <a:t>5</a:t>
+            </a:r>
+            <a:endParaRPr lang="en-US" sz="2050" dirty="0"/>
+          </a:p>
+        </p:txBody>
+      </p:sp>
+      <p:sp>
+        <p:nvSpPr>
+          <p:cNvPr id="17" name="Text 15"/>
+          <p:cNvSpPr/>
+          <p:nvPr/>
+        </p:nvSpPr>
+        <p:spPr>
+          <a:xfrm>
+            <a:off x="1198007" y="4386977"/>
+            <a:ext cx="2826901" cy="277416"/>
+          </a:xfrm>
+          <a:prstGeom prst="rect">
+            <a:avLst/>
+          </a:prstGeom>
+          <a:noFill/>
+          <a:ln/>
+        </p:spPr>
+        <p:txBody>
+          <a:bodyPr wrap="none" lIns="0" tIns="0" rIns="0" bIns="0" rtlCol="0" anchor="t"/>
+          <a:lstStyle/>
+          <a:p>
+            <a:pPr marL="0" indent="0" algn="l">
+              <a:lnSpc>
+                <a:spcPts val="2150"/>
+              </a:lnSpc>
+              <a:buNone/>
+            </a:pPr>
+            <a:r>
+              <a:rPr lang="en-US" sz="1700" dirty="0">
+                <a:solidFill>
+                  <a:srgbClr val="3C3939"/>
+                </a:solidFill>
+                <a:latin typeface="Raleway" pitchFamily="34" charset="0"/>
+                <a:ea typeface="Raleway" pitchFamily="34" charset="-122"/>
+                <a:cs typeface="Raleway" pitchFamily="34" charset="-120"/>
+              </a:rPr>
+              <a:t>Model Training &amp; Evaluation</a:t>
+            </a:r>
+            <a:endParaRPr lang="en-US" sz="1700" dirty="0"/>
+          </a:p>
+        </p:txBody>
+      </p:sp>
+      <p:sp>
+        <p:nvSpPr>
+          <p:cNvPr id="18" name="Shape 16"/>
+          <p:cNvSpPr/>
+          <p:nvPr/>
+        </p:nvSpPr>
+        <p:spPr>
+          <a:xfrm>
+            <a:off x="621268" y="5080278"/>
+            <a:ext cx="399336" cy="399336"/>
+          </a:xfrm>
+          <a:prstGeom prst="roundRect">
+            <a:avLst>
+              <a:gd name="adj" fmla="val 18670"/>
+            </a:avLst>
+          </a:prstGeom>
+          <a:solidFill>
+            <a:srgbClr val="E1E1EA"/>
+          </a:solidFill>
+          <a:ln w="7620">
+            <a:solidFill>
+              <a:srgbClr val="C7C7D0"/>
+            </a:solidFill>
+            <a:prstDash val="solid"/>
+          </a:ln>
+        </p:spPr>
+        <p:txBody>
+          <a:bodyPr/>
+          <a:lstStyle/>
+          <a:p>
+            <a:endParaRPr lang="en-IN"/>
+          </a:p>
+        </p:txBody>
+      </p:sp>
+      <p:sp>
+        <p:nvSpPr>
+          <p:cNvPr id="19" name="Text 17"/>
+          <p:cNvSpPr/>
+          <p:nvPr/>
+        </p:nvSpPr>
+        <p:spPr>
+          <a:xfrm>
+            <a:off x="687824" y="5113556"/>
+            <a:ext cx="266224" cy="332780"/>
+          </a:xfrm>
+          <a:prstGeom prst="rect">
+            <a:avLst/>
+          </a:prstGeom>
+          <a:noFill/>
+          <a:ln/>
+        </p:spPr>
+        <p:txBody>
+          <a:bodyPr wrap="none" lIns="0" tIns="0" rIns="0" bIns="0" rtlCol="0" anchor="t"/>
+          <a:lstStyle/>
+          <a:p>
+            <a:pPr marL="0" indent="0" algn="ctr">
+              <a:lnSpc>
+                <a:spcPts val="2050"/>
+              </a:lnSpc>
+              <a:buNone/>
+            </a:pPr>
+            <a:r>
+              <a:rPr lang="en-US" sz="2050" dirty="0">
+                <a:solidFill>
+                  <a:srgbClr val="3C3939"/>
+                </a:solidFill>
+                <a:latin typeface="Raleway" pitchFamily="34" charset="0"/>
+                <a:ea typeface="Raleway" pitchFamily="34" charset="-122"/>
+                <a:cs typeface="Raleway" pitchFamily="34" charset="-120"/>
+              </a:rPr>
+              <a:t>6</a:t>
+            </a:r>
+            <a:endParaRPr lang="en-US" sz="2050" dirty="0"/>
+          </a:p>
+        </p:txBody>
+      </p:sp>
+      <p:sp>
+        <p:nvSpPr>
+          <p:cNvPr id="20" name="Text 18"/>
+          <p:cNvSpPr/>
+          <p:nvPr/>
+        </p:nvSpPr>
+        <p:spPr>
+          <a:xfrm>
+            <a:off x="1198007" y="5141238"/>
+            <a:ext cx="2218968" cy="277416"/>
+          </a:xfrm>
+          <a:prstGeom prst="rect">
+            <a:avLst/>
+          </a:prstGeom>
+          <a:noFill/>
+          <a:ln/>
+        </p:spPr>
+        <p:txBody>
+          <a:bodyPr wrap="none" lIns="0" tIns="0" rIns="0" bIns="0" rtlCol="0" anchor="t"/>
+          <a:lstStyle/>
+          <a:p>
+            <a:pPr marL="0" indent="0" algn="l">
+              <a:lnSpc>
+                <a:spcPts val="2150"/>
+              </a:lnSpc>
+              <a:buNone/>
+            </a:pPr>
+            <a:r>
+              <a:rPr lang="en-US" sz="1700" dirty="0">
+                <a:solidFill>
+                  <a:srgbClr val="3C3939"/>
+                </a:solidFill>
+                <a:latin typeface="Raleway" pitchFamily="34" charset="0"/>
+                <a:ea typeface="Raleway" pitchFamily="34" charset="-122"/>
+                <a:cs typeface="Raleway" pitchFamily="34" charset="-120"/>
+              </a:rPr>
+              <a:t>Deployment and User Interface</a:t>
+            </a:r>
+            <a:endParaRPr lang="en-US" sz="1700" dirty="0"/>
+          </a:p>
+        </p:txBody>
+      </p:sp>
+      <p:sp>
+        <p:nvSpPr>
+          <p:cNvPr id="21" name="Shape 19"/>
+          <p:cNvSpPr/>
+          <p:nvPr/>
+        </p:nvSpPr>
+        <p:spPr>
+          <a:xfrm>
+            <a:off x="621268" y="5834539"/>
+            <a:ext cx="399336" cy="399336"/>
+          </a:xfrm>
+          <a:prstGeom prst="roundRect">
+            <a:avLst>
+              <a:gd name="adj" fmla="val 18670"/>
+            </a:avLst>
+          </a:prstGeom>
+          <a:solidFill>
+            <a:srgbClr val="E1E1EA"/>
+          </a:solidFill>
+          <a:ln w="7620">
+            <a:solidFill>
+              <a:srgbClr val="C7C7D0"/>
+            </a:solidFill>
+            <a:prstDash val="solid"/>
+          </a:ln>
+        </p:spPr>
+        <p:txBody>
+          <a:bodyPr/>
+          <a:lstStyle/>
+          <a:p>
+            <a:endParaRPr lang="en-IN"/>
+          </a:p>
+        </p:txBody>
+      </p:sp>
+      <p:sp>
+        <p:nvSpPr>
+          <p:cNvPr id="22" name="Text 20"/>
+          <p:cNvSpPr/>
+          <p:nvPr/>
+        </p:nvSpPr>
+        <p:spPr>
+          <a:xfrm>
+            <a:off x="687824" y="5867817"/>
+            <a:ext cx="266224" cy="332780"/>
+          </a:xfrm>
+          <a:prstGeom prst="rect">
+            <a:avLst/>
+          </a:prstGeom>
+          <a:noFill/>
+          <a:ln/>
+        </p:spPr>
+        <p:txBody>
+          <a:bodyPr wrap="none" lIns="0" tIns="0" rIns="0" bIns="0" rtlCol="0" anchor="t"/>
+          <a:lstStyle/>
+          <a:p>
+            <a:pPr marL="0" indent="0" algn="ctr">
+              <a:lnSpc>
+                <a:spcPts val="2050"/>
+              </a:lnSpc>
+              <a:buNone/>
+            </a:pPr>
+            <a:r>
+              <a:rPr lang="en-US" sz="2050" dirty="0">
+                <a:solidFill>
+                  <a:srgbClr val="3C3939"/>
+                </a:solidFill>
+                <a:latin typeface="Raleway" pitchFamily="34" charset="0"/>
+                <a:ea typeface="Raleway" pitchFamily="34" charset="-122"/>
+                <a:cs typeface="Raleway" pitchFamily="34" charset="-120"/>
+              </a:rPr>
+              <a:t>7</a:t>
+            </a:r>
+            <a:endParaRPr lang="en-US" sz="2050" dirty="0"/>
+          </a:p>
+        </p:txBody>
+      </p:sp>
+      <p:sp>
+        <p:nvSpPr>
+          <p:cNvPr id="23" name="Text 21"/>
+          <p:cNvSpPr/>
+          <p:nvPr/>
+        </p:nvSpPr>
+        <p:spPr>
+          <a:xfrm>
+            <a:off x="1198007" y="5895499"/>
+            <a:ext cx="2971086" cy="277416"/>
+          </a:xfrm>
+          <a:prstGeom prst="rect">
+            <a:avLst/>
+          </a:prstGeom>
+          <a:noFill/>
+          <a:ln/>
+        </p:spPr>
+        <p:txBody>
+          <a:bodyPr wrap="none" lIns="0" tIns="0" rIns="0" bIns="0" rtlCol="0" anchor="t"/>
+          <a:lstStyle/>
+          <a:p>
+            <a:pPr marL="0" indent="0" algn="l">
+              <a:lnSpc>
+                <a:spcPts val="2150"/>
+              </a:lnSpc>
+              <a:buNone/>
+            </a:pPr>
+            <a:r>
+              <a:rPr lang="en-US" sz="1700" dirty="0">
+                <a:solidFill>
+                  <a:srgbClr val="3C3939"/>
+                </a:solidFill>
+                <a:latin typeface="Raleway" pitchFamily="34" charset="0"/>
+              </a:rPr>
+              <a:t>Architecture Diagram</a:t>
+            </a:r>
+            <a:endParaRPr lang="en-US" sz="1700" dirty="0"/>
+          </a:p>
+        </p:txBody>
+      </p:sp>
+      <p:sp>
+        <p:nvSpPr>
+          <p:cNvPr id="24" name="Shape 22"/>
+          <p:cNvSpPr/>
+          <p:nvPr/>
+        </p:nvSpPr>
+        <p:spPr>
+          <a:xfrm>
+            <a:off x="621268" y="6588800"/>
+            <a:ext cx="399336" cy="399336"/>
+          </a:xfrm>
+          <a:prstGeom prst="roundRect">
+            <a:avLst>
+              <a:gd name="adj" fmla="val 18670"/>
+            </a:avLst>
+          </a:prstGeom>
+          <a:solidFill>
+            <a:srgbClr val="E1E1EA"/>
+          </a:solidFill>
+          <a:ln w="7620">
+            <a:solidFill>
+              <a:srgbClr val="C7C7D0"/>
+            </a:solidFill>
+            <a:prstDash val="solid"/>
+          </a:ln>
+        </p:spPr>
+        <p:txBody>
+          <a:bodyPr/>
+          <a:lstStyle/>
+          <a:p>
+            <a:endParaRPr lang="en-IN"/>
+          </a:p>
+        </p:txBody>
+      </p:sp>
+      <p:sp>
+        <p:nvSpPr>
+          <p:cNvPr id="25" name="Text 23"/>
+          <p:cNvSpPr/>
+          <p:nvPr/>
+        </p:nvSpPr>
+        <p:spPr>
+          <a:xfrm>
+            <a:off x="687824" y="6622078"/>
+            <a:ext cx="266224" cy="332780"/>
+          </a:xfrm>
+          <a:prstGeom prst="rect">
+            <a:avLst/>
+          </a:prstGeom>
+          <a:noFill/>
+          <a:ln/>
+        </p:spPr>
+        <p:txBody>
+          <a:bodyPr wrap="none" lIns="0" tIns="0" rIns="0" bIns="0" rtlCol="0" anchor="t"/>
+          <a:lstStyle/>
+          <a:p>
+            <a:pPr marL="0" indent="0" algn="ctr">
+              <a:lnSpc>
+                <a:spcPts val="2050"/>
+              </a:lnSpc>
+              <a:buNone/>
+            </a:pPr>
+            <a:r>
+              <a:rPr lang="en-US" sz="2050" dirty="0">
+                <a:solidFill>
+                  <a:srgbClr val="3C3939"/>
+                </a:solidFill>
+                <a:latin typeface="Raleway" pitchFamily="34" charset="0"/>
+                <a:ea typeface="Raleway" pitchFamily="34" charset="-122"/>
+                <a:cs typeface="Raleway" pitchFamily="34" charset="-120"/>
+              </a:rPr>
+              <a:t>8</a:t>
+            </a:r>
+            <a:endParaRPr lang="en-US" sz="2050" dirty="0"/>
+          </a:p>
+        </p:txBody>
+      </p:sp>
+      <p:sp>
+        <p:nvSpPr>
+          <p:cNvPr id="26" name="Text 24"/>
+          <p:cNvSpPr/>
+          <p:nvPr/>
+        </p:nvSpPr>
+        <p:spPr>
+          <a:xfrm>
+            <a:off x="1198007" y="6649760"/>
+            <a:ext cx="3600331" cy="277416"/>
+          </a:xfrm>
+          <a:prstGeom prst="rect">
+            <a:avLst/>
+          </a:prstGeom>
+          <a:noFill/>
+          <a:ln/>
+        </p:spPr>
+        <p:txBody>
+          <a:bodyPr wrap="none" lIns="0" tIns="0" rIns="0" bIns="0" rtlCol="0" anchor="t"/>
+          <a:lstStyle/>
+          <a:p>
+            <a:pPr marL="0" indent="0" algn="l">
+              <a:lnSpc>
+                <a:spcPts val="2150"/>
+              </a:lnSpc>
+              <a:buNone/>
+            </a:pPr>
+            <a:r>
+              <a:rPr lang="en-US" sz="1700" dirty="0">
+                <a:solidFill>
+                  <a:srgbClr val="3C3939"/>
+                </a:solidFill>
+                <a:latin typeface="Raleway" pitchFamily="34" charset="0"/>
+                <a:ea typeface="Raleway" pitchFamily="34" charset="-122"/>
+                <a:cs typeface="Raleway" pitchFamily="34" charset="-120"/>
+              </a:rPr>
+              <a:t>Automated Monitoring &amp; Retraining</a:t>
+            </a:r>
+            <a:endParaRPr lang="en-US" sz="1700" dirty="0"/>
+          </a:p>
+        </p:txBody>
+      </p:sp>
+      <p:sp>
+        <p:nvSpPr>
+          <p:cNvPr id="27" name="Shape 25"/>
+          <p:cNvSpPr/>
+          <p:nvPr/>
+        </p:nvSpPr>
+        <p:spPr>
+          <a:xfrm>
+            <a:off x="621268" y="7343061"/>
+            <a:ext cx="399336" cy="399336"/>
+          </a:xfrm>
+          <a:prstGeom prst="roundRect">
+            <a:avLst>
+              <a:gd name="adj" fmla="val 18670"/>
+            </a:avLst>
+          </a:prstGeom>
+          <a:solidFill>
+            <a:srgbClr val="E1E1EA"/>
+          </a:solidFill>
+          <a:ln w="7620">
+            <a:solidFill>
+              <a:srgbClr val="C7C7D0"/>
+            </a:solidFill>
+            <a:prstDash val="solid"/>
+          </a:ln>
+        </p:spPr>
+        <p:txBody>
+          <a:bodyPr/>
+          <a:lstStyle/>
+          <a:p>
+            <a:endParaRPr lang="en-IN"/>
+          </a:p>
+        </p:txBody>
+      </p:sp>
+      <p:sp>
+        <p:nvSpPr>
+          <p:cNvPr id="28" name="Text 26"/>
+          <p:cNvSpPr/>
+          <p:nvPr/>
+        </p:nvSpPr>
+        <p:spPr>
+          <a:xfrm>
+            <a:off x="687824" y="7376339"/>
+            <a:ext cx="266224" cy="332780"/>
+          </a:xfrm>
+          <a:prstGeom prst="rect">
+            <a:avLst/>
+          </a:prstGeom>
+          <a:noFill/>
+          <a:ln/>
+        </p:spPr>
+        <p:txBody>
+          <a:bodyPr wrap="none" lIns="0" tIns="0" rIns="0" bIns="0" rtlCol="0" anchor="t"/>
+          <a:lstStyle/>
+          <a:p>
+            <a:pPr marL="0" indent="0" algn="ctr">
+              <a:lnSpc>
+                <a:spcPts val="2050"/>
+              </a:lnSpc>
+              <a:buNone/>
+            </a:pPr>
+            <a:r>
+              <a:rPr lang="en-US" sz="2050" dirty="0">
+                <a:solidFill>
+                  <a:srgbClr val="3C3939"/>
+                </a:solidFill>
+                <a:latin typeface="Raleway" pitchFamily="34" charset="0"/>
+                <a:ea typeface="Raleway" pitchFamily="34" charset="-122"/>
+                <a:cs typeface="Raleway" pitchFamily="34" charset="-120"/>
+              </a:rPr>
+              <a:t>9</a:t>
+            </a:r>
+            <a:endParaRPr lang="en-US" sz="2050" dirty="0"/>
+          </a:p>
+        </p:txBody>
+      </p:sp>
+      <p:sp>
+        <p:nvSpPr>
+          <p:cNvPr id="29" name="Text 27"/>
+          <p:cNvSpPr/>
+          <p:nvPr/>
+        </p:nvSpPr>
+        <p:spPr>
+          <a:xfrm>
+            <a:off x="1198007" y="7404021"/>
+            <a:ext cx="3060144" cy="277416"/>
+          </a:xfrm>
+          <a:prstGeom prst="rect">
+            <a:avLst/>
+          </a:prstGeom>
+          <a:noFill/>
+          <a:ln/>
+        </p:spPr>
+        <p:txBody>
+          <a:bodyPr wrap="none" lIns="0" tIns="0" rIns="0" bIns="0" rtlCol="0" anchor="t"/>
+          <a:lstStyle/>
+          <a:p>
+            <a:pPr marL="0" indent="0" algn="l">
+              <a:lnSpc>
+                <a:spcPts val="2150"/>
+              </a:lnSpc>
+              <a:buNone/>
+            </a:pPr>
+            <a:r>
+              <a:rPr lang="en-US" sz="1700" dirty="0">
+                <a:solidFill>
+                  <a:srgbClr val="3C3939"/>
+                </a:solidFill>
+                <a:latin typeface="Raleway" pitchFamily="34" charset="0"/>
+                <a:ea typeface="Raleway" pitchFamily="34" charset="-122"/>
+                <a:cs typeface="Raleway" pitchFamily="34" charset="-120"/>
+              </a:rPr>
+              <a:t>Business Value &amp; Future Work</a:t>
+            </a:r>
+            <a:endParaRPr lang="en-US" sz="1700" dirty="0"/>
           </a:p>
         </p:txBody>
       </p:sp>
       <p:pic>
         <p:nvPicPr>
-          <p:cNvPr id="8" name="Picture 7">
+          <p:cNvPr id="31" name="Picture 30">
             <a:extLst>
               <a:ext uri="{FF2B5EF4-FFF2-40B4-BE49-F238E27FC236}">
-                <a16:creationId xmlns:a16="http://schemas.microsoft.com/office/drawing/2014/main" id="{D9900EF8-EE71-EF23-0FEE-120ED75E89A8}"/>
+                <a16:creationId xmlns:a16="http://schemas.microsoft.com/office/drawing/2014/main" id="{193BF85E-E279-4D0C-6789-E5206A9AFC69}"/>
               </a:ext>
             </a:extLst>
           </p:cNvPr>
@@ -3537,8 +5128,8 @@
         </p:blipFill>
         <p:spPr>
           <a:xfrm>
-            <a:off x="12316342" y="7790107"/>
-            <a:ext cx="2314058" cy="385676"/>
+            <a:off x="12241768" y="7542729"/>
+            <a:ext cx="2381250" cy="638175"/>
           </a:xfrm>
           <a:prstGeom prst="rect">
             <a:avLst/>
@@ -3555,7 +5146,7 @@
 
 <file path=ppt/slides/slide3.xml><?xml version="1.0" encoding="utf-8"?>
 <p:sld xmlns:a="http://schemas.openxmlformats.org/drawingml/2006/main" xmlns:r="http://schemas.openxmlformats.org/officeDocument/2006/relationships" xmlns:p="http://schemas.openxmlformats.org/presentationml/2006/main">
-  <p:cSld name="Slide 3">
+  <p:cSld>
     <p:spTree>
       <p:nvGrpSpPr>
         <p:cNvPr id="1" name=""/>
@@ -3578,8 +5169,8 @@
         </p:nvSpPr>
         <p:spPr>
           <a:xfrm>
-            <a:off x="793790" y="1882140"/>
-            <a:ext cx="6811685" cy="708779"/>
+            <a:off x="793790" y="823317"/>
+            <a:ext cx="13042821" cy="1417558"/>
           </a:xfrm>
           <a:prstGeom prst="rect">
             <a:avLst/>
@@ -3588,7 +5179,7 @@
           <a:ln/>
         </p:spPr>
         <p:txBody>
-          <a:bodyPr wrap="none" lIns="0" tIns="0" rIns="0" bIns="0" rtlCol="0" anchor="t"/>
+          <a:bodyPr wrap="square" lIns="0" tIns="0" rIns="0" bIns="0" rtlCol="0" anchor="t"/>
           <a:lstStyle/>
           <a:p>
             <a:pPr marL="0" indent="0" algn="l">
@@ -3606,15 +5197,362 @@
                 <a:ea typeface="Raleway" pitchFamily="34" charset="-122"/>
                 <a:cs typeface="Raleway" pitchFamily="34" charset="-120"/>
               </a:rPr>
-              <a:t>Project Objective &amp; Scope</a:t>
+              <a:t>The Business Challenge: Inefficient Sales Prioritization</a:t>
             </a:r>
             <a:endParaRPr lang="en-US" sz="4450" dirty="0"/>
+          </a:p>
+        </p:txBody>
+      </p:sp>
+      <p:sp>
+        <p:nvSpPr>
+          <p:cNvPr id="3" name="Text 1"/>
+          <p:cNvSpPr/>
+          <p:nvPr/>
+        </p:nvSpPr>
+        <p:spPr>
+          <a:xfrm>
+            <a:off x="793790" y="2581037"/>
+            <a:ext cx="3402330" cy="425291"/>
+          </a:xfrm>
+          <a:prstGeom prst="rect">
+            <a:avLst/>
+          </a:prstGeom>
+          <a:noFill/>
+          <a:ln/>
+        </p:spPr>
+        <p:txBody>
+          <a:bodyPr wrap="none" lIns="0" tIns="0" rIns="0" bIns="0" rtlCol="0" anchor="t"/>
+          <a:lstStyle/>
+          <a:p>
+            <a:pPr marL="0" indent="0" algn="l">
+              <a:lnSpc>
+                <a:spcPts val="3300"/>
+              </a:lnSpc>
+              <a:buNone/>
+            </a:pPr>
+            <a:r>
+              <a:rPr lang="en-US" sz="2650" dirty="0">
+                <a:solidFill>
+                  <a:srgbClr val="1B1B27"/>
+                </a:solidFill>
+                <a:latin typeface="Raleway" pitchFamily="34" charset="0"/>
+                <a:ea typeface="Raleway" pitchFamily="34" charset="-122"/>
+                <a:cs typeface="Raleway" pitchFamily="34" charset="-120"/>
+              </a:rPr>
+              <a:t>The Problem</a:t>
+            </a:r>
+            <a:endParaRPr lang="en-US" sz="2650" dirty="0"/>
+          </a:p>
+        </p:txBody>
+      </p:sp>
+      <p:sp>
+        <p:nvSpPr>
+          <p:cNvPr id="4" name="Text 2"/>
+          <p:cNvSpPr/>
+          <p:nvPr/>
+        </p:nvSpPr>
+        <p:spPr>
+          <a:xfrm>
+            <a:off x="793790" y="3346490"/>
+            <a:ext cx="13042821" cy="725805"/>
+          </a:xfrm>
+          <a:prstGeom prst="rect">
+            <a:avLst/>
+          </a:prstGeom>
+          <a:noFill/>
+          <a:ln/>
+        </p:spPr>
+        <p:txBody>
+          <a:bodyPr wrap="square" lIns="0" tIns="0" rIns="0" bIns="0" rtlCol="0" anchor="t"/>
+          <a:lstStyle/>
+          <a:p>
+            <a:pPr marL="0" indent="0" algn="l">
+              <a:lnSpc>
+                <a:spcPts val="2850"/>
+              </a:lnSpc>
+              <a:buNone/>
+            </a:pPr>
+            <a:r>
+              <a:rPr lang="en-US" sz="1750" dirty="0">
+                <a:solidFill>
+                  <a:srgbClr val="3C3939"/>
+                </a:solidFill>
+                <a:latin typeface="Roboto" pitchFamily="34" charset="0"/>
+                <a:ea typeface="Roboto" pitchFamily="34" charset="-122"/>
+                <a:cs typeface="Roboto" pitchFamily="34" charset="-120"/>
+              </a:rPr>
+              <a:t>The B2B sales cycle often faces </a:t>
+            </a:r>
+            <a:r>
+              <a:rPr lang="en-US" sz="1750" b="1" dirty="0">
+                <a:solidFill>
+                  <a:srgbClr val="3C3939"/>
+                </a:solidFill>
+                <a:latin typeface="Roboto" pitchFamily="34" charset="0"/>
+                <a:ea typeface="Roboto" pitchFamily="34" charset="-122"/>
+                <a:cs typeface="Roboto" pitchFamily="34" charset="-120"/>
+              </a:rPr>
+              <a:t>inefficiency due to significant lead drop-off</a:t>
+            </a:r>
+            <a:r>
+              <a:rPr lang="en-US" sz="1750" dirty="0">
+                <a:solidFill>
+                  <a:srgbClr val="3C3939"/>
+                </a:solidFill>
+                <a:latin typeface="Roboto" pitchFamily="34" charset="0"/>
+                <a:ea typeface="Roboto" pitchFamily="34" charset="-122"/>
+                <a:cs typeface="Roboto" pitchFamily="34" charset="-120"/>
+              </a:rPr>
+              <a:t>. Without an intelligent prioritization mechanism, sales teams spend valuable time on leads with low conversion potential. This results in:</a:t>
+            </a:r>
+            <a:endParaRPr lang="en-US" sz="1750" dirty="0"/>
+          </a:p>
+        </p:txBody>
+      </p:sp>
+      <p:sp>
+        <p:nvSpPr>
+          <p:cNvPr id="5" name="Text 3"/>
+          <p:cNvSpPr/>
+          <p:nvPr/>
+        </p:nvSpPr>
+        <p:spPr>
+          <a:xfrm>
+            <a:off x="793790" y="4327446"/>
+            <a:ext cx="13042821" cy="362903"/>
+          </a:xfrm>
+          <a:prstGeom prst="rect">
+            <a:avLst/>
+          </a:prstGeom>
+          <a:noFill/>
+          <a:ln/>
+        </p:spPr>
+        <p:txBody>
+          <a:bodyPr wrap="none" lIns="0" tIns="0" rIns="0" bIns="0" rtlCol="0" anchor="t"/>
+          <a:lstStyle/>
+          <a:p>
+            <a:pPr marL="342900" indent="-342900" algn="l">
+              <a:lnSpc>
+                <a:spcPts val="2850"/>
+              </a:lnSpc>
+              <a:buSzPct val="100000"/>
+              <a:buChar char="•"/>
+            </a:pPr>
+            <a:r>
+              <a:rPr lang="en-US" sz="1750" dirty="0">
+                <a:solidFill>
+                  <a:srgbClr val="3C3939"/>
+                </a:solidFill>
+                <a:latin typeface="Roboto" pitchFamily="34" charset="0"/>
+                <a:ea typeface="Roboto" pitchFamily="34" charset="-122"/>
+                <a:cs typeface="Roboto" pitchFamily="34" charset="-120"/>
+              </a:rPr>
+              <a:t>Suboptimal resource allocation</a:t>
+            </a:r>
+            <a:endParaRPr lang="en-US" sz="1750" dirty="0"/>
+          </a:p>
+        </p:txBody>
+      </p:sp>
+      <p:sp>
+        <p:nvSpPr>
+          <p:cNvPr id="6" name="Text 4"/>
+          <p:cNvSpPr/>
+          <p:nvPr/>
+        </p:nvSpPr>
+        <p:spPr>
+          <a:xfrm>
+            <a:off x="793790" y="4769644"/>
+            <a:ext cx="13042821" cy="362903"/>
+          </a:xfrm>
+          <a:prstGeom prst="rect">
+            <a:avLst/>
+          </a:prstGeom>
+          <a:noFill/>
+          <a:ln/>
+        </p:spPr>
+        <p:txBody>
+          <a:bodyPr wrap="none" lIns="0" tIns="0" rIns="0" bIns="0" rtlCol="0" anchor="t"/>
+          <a:lstStyle/>
+          <a:p>
+            <a:pPr marL="342900" indent="-342900" algn="l">
+              <a:lnSpc>
+                <a:spcPts val="2850"/>
+              </a:lnSpc>
+              <a:buSzPct val="100000"/>
+              <a:buChar char="•"/>
+            </a:pPr>
+            <a:r>
+              <a:rPr lang="en-US" sz="1750" dirty="0">
+                <a:solidFill>
+                  <a:srgbClr val="3C3939"/>
+                </a:solidFill>
+                <a:latin typeface="Roboto" pitchFamily="34" charset="0"/>
+                <a:ea typeface="Roboto" pitchFamily="34" charset="-122"/>
+                <a:cs typeface="Roboto" pitchFamily="34" charset="-120"/>
+              </a:rPr>
+              <a:t>Reduced sales productivity</a:t>
+            </a:r>
+            <a:endParaRPr lang="en-US" sz="1750" dirty="0"/>
+          </a:p>
+        </p:txBody>
+      </p:sp>
+      <p:sp>
+        <p:nvSpPr>
+          <p:cNvPr id="7" name="Text 5"/>
+          <p:cNvSpPr/>
+          <p:nvPr/>
+        </p:nvSpPr>
+        <p:spPr>
+          <a:xfrm>
+            <a:off x="793790" y="5211842"/>
+            <a:ext cx="13042821" cy="362903"/>
+          </a:xfrm>
+          <a:prstGeom prst="rect">
+            <a:avLst/>
+          </a:prstGeom>
+          <a:noFill/>
+          <a:ln/>
+        </p:spPr>
+        <p:txBody>
+          <a:bodyPr wrap="none" lIns="0" tIns="0" rIns="0" bIns="0" rtlCol="0" anchor="t"/>
+          <a:lstStyle/>
+          <a:p>
+            <a:pPr marL="342900" indent="-342900" algn="l">
+              <a:lnSpc>
+                <a:spcPts val="2850"/>
+              </a:lnSpc>
+              <a:buSzPct val="100000"/>
+              <a:buChar char="•"/>
+            </a:pPr>
+            <a:r>
+              <a:rPr lang="en-US" sz="1750" dirty="0">
+                <a:solidFill>
+                  <a:srgbClr val="3C3939"/>
+                </a:solidFill>
+                <a:latin typeface="Roboto" pitchFamily="34" charset="0"/>
+                <a:ea typeface="Roboto" pitchFamily="34" charset="-122"/>
+                <a:cs typeface="Roboto" pitchFamily="34" charset="-120"/>
+              </a:rPr>
+              <a:t>Missed opportunities for high-potential leads</a:t>
+            </a:r>
+            <a:endParaRPr lang="en-US" sz="1750" dirty="0"/>
+          </a:p>
+        </p:txBody>
+      </p:sp>
+      <p:sp>
+        <p:nvSpPr>
+          <p:cNvPr id="8" name="Text 6"/>
+          <p:cNvSpPr/>
+          <p:nvPr/>
+        </p:nvSpPr>
+        <p:spPr>
+          <a:xfrm>
+            <a:off x="793790" y="5914906"/>
+            <a:ext cx="3402330" cy="425291"/>
+          </a:xfrm>
+          <a:prstGeom prst="rect">
+            <a:avLst/>
+          </a:prstGeom>
+          <a:noFill/>
+          <a:ln/>
+        </p:spPr>
+        <p:txBody>
+          <a:bodyPr wrap="none" lIns="0" tIns="0" rIns="0" bIns="0" rtlCol="0" anchor="t"/>
+          <a:lstStyle/>
+          <a:p>
+            <a:pPr marL="0" indent="0" algn="l">
+              <a:lnSpc>
+                <a:spcPts val="3300"/>
+              </a:lnSpc>
+              <a:buNone/>
+            </a:pPr>
+            <a:r>
+              <a:rPr lang="en-US" sz="2650" dirty="0">
+                <a:solidFill>
+                  <a:srgbClr val="1B1B27"/>
+                </a:solidFill>
+                <a:latin typeface="Raleway" pitchFamily="34" charset="0"/>
+                <a:ea typeface="Raleway" pitchFamily="34" charset="-122"/>
+                <a:cs typeface="Raleway" pitchFamily="34" charset="-120"/>
+              </a:rPr>
+              <a:t>Objective</a:t>
+            </a:r>
+            <a:endParaRPr lang="en-US" sz="2650" dirty="0"/>
+          </a:p>
+        </p:txBody>
+      </p:sp>
+      <p:sp>
+        <p:nvSpPr>
+          <p:cNvPr id="9" name="Text 7"/>
+          <p:cNvSpPr/>
+          <p:nvPr/>
+        </p:nvSpPr>
+        <p:spPr>
+          <a:xfrm>
+            <a:off x="793790" y="6680359"/>
+            <a:ext cx="13042821" cy="725805"/>
+          </a:xfrm>
+          <a:prstGeom prst="rect">
+            <a:avLst/>
+          </a:prstGeom>
+          <a:noFill/>
+          <a:ln/>
+        </p:spPr>
+        <p:txBody>
+          <a:bodyPr wrap="square" lIns="0" tIns="0" rIns="0" bIns="0" rtlCol="0" anchor="t"/>
+          <a:lstStyle/>
+          <a:p>
+            <a:pPr marL="0" indent="0" algn="l">
+              <a:lnSpc>
+                <a:spcPts val="2850"/>
+              </a:lnSpc>
+              <a:buNone/>
+            </a:pPr>
+            <a:r>
+              <a:rPr lang="en-US" sz="1750" dirty="0">
+                <a:solidFill>
+                  <a:srgbClr val="3C3939"/>
+                </a:solidFill>
+                <a:latin typeface="Roboto" pitchFamily="34" charset="0"/>
+                <a:ea typeface="Roboto" pitchFamily="34" charset="-122"/>
+                <a:cs typeface="Roboto" pitchFamily="34" charset="-120"/>
+              </a:rPr>
+              <a:t>The objective is to leverage data to </a:t>
+            </a:r>
+            <a:r>
+              <a:rPr lang="en-US" sz="1750" b="1" dirty="0">
+                <a:solidFill>
+                  <a:srgbClr val="3C3939"/>
+                </a:solidFill>
+                <a:latin typeface="Roboto" pitchFamily="34" charset="0"/>
+                <a:ea typeface="Roboto" pitchFamily="34" charset="-122"/>
+                <a:cs typeface="Roboto" pitchFamily="34" charset="-120"/>
+              </a:rPr>
+              <a:t>improve ROI and focus our sales efforts</a:t>
+            </a:r>
+            <a:r>
+              <a:rPr lang="en-US" sz="1750" dirty="0">
+                <a:solidFill>
+                  <a:srgbClr val="3C3939"/>
+                </a:solidFill>
+                <a:latin typeface="Roboto" pitchFamily="34" charset="0"/>
+                <a:ea typeface="Roboto" pitchFamily="34" charset="-122"/>
+                <a:cs typeface="Roboto" pitchFamily="34" charset="-120"/>
+              </a:rPr>
+              <a:t> more effectively by intelligently prioritizing leads with the highest conversion potential.</a:t>
+            </a:r>
+            <a:endParaRPr lang="en-US" sz="1750" dirty="0"/>
           </a:p>
         </p:txBody>
       </p:sp>
       <p:pic>
         <p:nvPicPr>
-          <p:cNvPr id="3" name="Image 0" descr="preencoded.png"/>
+          <p:cNvPr id="11" name="Picture 10">
+            <a:extLst>
+              <a:ext uri="{FF2B5EF4-FFF2-40B4-BE49-F238E27FC236}">
+                <a16:creationId xmlns:a16="http://schemas.microsoft.com/office/drawing/2014/main" id="{453F4A34-15A3-1D5F-9DC1-3D4CEE7D7395}"/>
+              </a:ext>
+            </a:extLst>
+          </p:cNvPr>
           <p:cNvPicPr>
             <a:picLocks noChangeAspect="1"/>
           </p:cNvPicPr>
@@ -3628,404 +5566,8 @@
         </p:blipFill>
         <p:spPr>
           <a:xfrm>
-            <a:off x="793790" y="3044547"/>
-            <a:ext cx="4347567" cy="907256"/>
-          </a:xfrm>
-          <a:prstGeom prst="rect">
-            <a:avLst/>
-          </a:prstGeom>
-        </p:spPr>
-      </p:pic>
-      <p:sp>
-        <p:nvSpPr>
-          <p:cNvPr id="4" name="Text 1"/>
-          <p:cNvSpPr/>
-          <p:nvPr/>
-        </p:nvSpPr>
-        <p:spPr>
-          <a:xfrm>
-            <a:off x="1020604" y="4178617"/>
-            <a:ext cx="3655814" cy="354330"/>
-          </a:xfrm>
-          <a:prstGeom prst="rect">
-            <a:avLst/>
-          </a:prstGeom>
-          <a:noFill/>
-          <a:ln/>
-        </p:spPr>
-        <p:txBody>
-          <a:bodyPr wrap="none" lIns="0" tIns="0" rIns="0" bIns="0" rtlCol="0" anchor="t"/>
-          <a:lstStyle/>
-          <a:p>
-            <a:pPr marL="0" indent="0" algn="l">
-              <a:lnSpc>
-                <a:spcPts val="2750"/>
-              </a:lnSpc>
-              <a:buNone/>
-            </a:pPr>
-            <a:r>
-              <a:rPr lang="en-US" sz="2200" dirty="0">
-                <a:solidFill>
-                  <a:srgbClr val="3C3939"/>
-                </a:solidFill>
-                <a:latin typeface="Raleway" pitchFamily="34" charset="0"/>
-                <a:ea typeface="Raleway" pitchFamily="34" charset="-122"/>
-                <a:cs typeface="Raleway" pitchFamily="34" charset="-120"/>
-              </a:rPr>
-              <a:t>Build a Predictive ML Model</a:t>
-            </a:r>
-            <a:endParaRPr lang="en-US" sz="2200" dirty="0"/>
-          </a:p>
-        </p:txBody>
-      </p:sp>
-      <p:sp>
-        <p:nvSpPr>
-          <p:cNvPr id="5" name="Text 2"/>
-          <p:cNvSpPr/>
-          <p:nvPr/>
-        </p:nvSpPr>
-        <p:spPr>
-          <a:xfrm>
-            <a:off x="1020604" y="4669036"/>
-            <a:ext cx="3893939" cy="1451610"/>
-          </a:xfrm>
-          <a:prstGeom prst="rect">
-            <a:avLst/>
-          </a:prstGeom>
-          <a:noFill/>
-          <a:ln/>
-        </p:spPr>
-        <p:txBody>
-          <a:bodyPr wrap="square" lIns="0" tIns="0" rIns="0" bIns="0" rtlCol="0" anchor="t"/>
-          <a:lstStyle/>
-          <a:p>
-            <a:pPr marL="0" indent="0" algn="l">
-              <a:lnSpc>
-                <a:spcPts val="2850"/>
-              </a:lnSpc>
-              <a:buNone/>
-            </a:pPr>
-            <a:r>
-              <a:rPr lang="en-US" sz="1750" dirty="0">
-                <a:solidFill>
-                  <a:srgbClr val="3C3939"/>
-                </a:solidFill>
-                <a:latin typeface="Roboto" pitchFamily="34" charset="0"/>
-                <a:ea typeface="Roboto" pitchFamily="34" charset="-122"/>
-                <a:cs typeface="Roboto" pitchFamily="34" charset="-120"/>
-              </a:rPr>
-              <a:t>Develop a robust machine learning model to </a:t>
-            </a:r>
-            <a:r>
-              <a:rPr lang="en-US" sz="1750" b="1" dirty="0">
-                <a:solidFill>
-                  <a:srgbClr val="3C3939"/>
-                </a:solidFill>
-                <a:latin typeface="Roboto" pitchFamily="34" charset="0"/>
-                <a:ea typeface="Roboto" pitchFamily="34" charset="-122"/>
-                <a:cs typeface="Roboto" pitchFamily="34" charset="-120"/>
-              </a:rPr>
-              <a:t>predict the probability of lead conversion</a:t>
-            </a:r>
-            <a:r>
-              <a:rPr lang="en-US" sz="1750" dirty="0">
-                <a:solidFill>
-                  <a:srgbClr val="3C3939"/>
-                </a:solidFill>
-                <a:latin typeface="Roboto" pitchFamily="34" charset="0"/>
-                <a:ea typeface="Roboto" pitchFamily="34" charset="-122"/>
-                <a:cs typeface="Roboto" pitchFamily="34" charset="-120"/>
-              </a:rPr>
-              <a:t> into paying customers.</a:t>
-            </a:r>
-            <a:endParaRPr lang="en-US" sz="1750" dirty="0"/>
-          </a:p>
-        </p:txBody>
-      </p:sp>
-      <p:pic>
-        <p:nvPicPr>
-          <p:cNvPr id="6" name="Image 1" descr="preencoded.png"/>
-          <p:cNvPicPr>
-            <a:picLocks noChangeAspect="1"/>
-          </p:cNvPicPr>
-          <p:nvPr/>
-        </p:nvPicPr>
-        <p:blipFill>
-          <a:blip r:embed="rId4"/>
-          <a:stretch>
-            <a:fillRect/>
-          </a:stretch>
-        </p:blipFill>
-        <p:spPr>
-          <a:xfrm>
-            <a:off x="5141357" y="3044547"/>
-            <a:ext cx="4347567" cy="907256"/>
-          </a:xfrm>
-          <a:prstGeom prst="rect">
-            <a:avLst/>
-          </a:prstGeom>
-        </p:spPr>
-      </p:pic>
-      <p:sp>
-        <p:nvSpPr>
-          <p:cNvPr id="7" name="Text 3"/>
-          <p:cNvSpPr/>
-          <p:nvPr/>
-        </p:nvSpPr>
-        <p:spPr>
-          <a:xfrm>
-            <a:off x="5368171" y="4178617"/>
-            <a:ext cx="2835235" cy="354330"/>
-          </a:xfrm>
-          <a:prstGeom prst="rect">
-            <a:avLst/>
-          </a:prstGeom>
-          <a:noFill/>
-          <a:ln/>
-        </p:spPr>
-        <p:txBody>
-          <a:bodyPr wrap="none" lIns="0" tIns="0" rIns="0" bIns="0" rtlCol="0" anchor="t"/>
-          <a:lstStyle/>
-          <a:p>
-            <a:pPr marL="0" indent="0" algn="l">
-              <a:lnSpc>
-                <a:spcPts val="2750"/>
-              </a:lnSpc>
-              <a:buNone/>
-            </a:pPr>
-            <a:r>
-              <a:rPr lang="en-US" sz="2200" dirty="0">
-                <a:solidFill>
-                  <a:srgbClr val="3C3939"/>
-                </a:solidFill>
-                <a:latin typeface="Raleway" pitchFamily="34" charset="0"/>
-                <a:ea typeface="Raleway" pitchFamily="34" charset="-122"/>
-                <a:cs typeface="Raleway" pitchFamily="34" charset="-120"/>
-              </a:rPr>
-              <a:t>Classify Lead Priority</a:t>
-            </a:r>
-            <a:endParaRPr lang="en-US" sz="2200" dirty="0"/>
-          </a:p>
-        </p:txBody>
-      </p:sp>
-      <p:sp>
-        <p:nvSpPr>
-          <p:cNvPr id="8" name="Text 4"/>
-          <p:cNvSpPr/>
-          <p:nvPr/>
-        </p:nvSpPr>
-        <p:spPr>
-          <a:xfrm>
-            <a:off x="5368171" y="4669036"/>
-            <a:ext cx="3893939" cy="1451610"/>
-          </a:xfrm>
-          <a:prstGeom prst="rect">
-            <a:avLst/>
-          </a:prstGeom>
-          <a:noFill/>
-          <a:ln/>
-        </p:spPr>
-        <p:txBody>
-          <a:bodyPr wrap="square" lIns="0" tIns="0" rIns="0" bIns="0" rtlCol="0" anchor="t"/>
-          <a:lstStyle/>
-          <a:p>
-            <a:pPr marL="0" indent="0" algn="l">
-              <a:lnSpc>
-                <a:spcPts val="2850"/>
-              </a:lnSpc>
-              <a:buNone/>
-            </a:pPr>
-            <a:r>
-              <a:rPr lang="en-US" sz="1750" dirty="0">
-                <a:solidFill>
-                  <a:srgbClr val="3C3939"/>
-                </a:solidFill>
-                <a:latin typeface="Roboto" pitchFamily="34" charset="0"/>
-                <a:ea typeface="Roboto" pitchFamily="34" charset="-122"/>
-                <a:cs typeface="Roboto" pitchFamily="34" charset="-120"/>
-              </a:rPr>
-              <a:t>Categorize new leads into distinct priority levels: </a:t>
-            </a:r>
-            <a:r>
-              <a:rPr lang="en-US" sz="1750" b="1" dirty="0">
-                <a:solidFill>
-                  <a:srgbClr val="3C3939"/>
-                </a:solidFill>
-                <a:latin typeface="Roboto" pitchFamily="34" charset="0"/>
-                <a:ea typeface="Roboto" pitchFamily="34" charset="-122"/>
-                <a:cs typeface="Roboto" pitchFamily="34" charset="-120"/>
-              </a:rPr>
-              <a:t>High, Medium, and Low</a:t>
-            </a:r>
-            <a:r>
-              <a:rPr lang="en-US" sz="1750" dirty="0">
-                <a:solidFill>
-                  <a:srgbClr val="3C3939"/>
-                </a:solidFill>
-                <a:latin typeface="Roboto" pitchFamily="34" charset="0"/>
-                <a:ea typeface="Roboto" pitchFamily="34" charset="-122"/>
-                <a:cs typeface="Roboto" pitchFamily="34" charset="-120"/>
-              </a:rPr>
-              <a:t>, based on their predicted conversion likelihood.</a:t>
-            </a:r>
-            <a:endParaRPr lang="en-US" sz="1750" dirty="0"/>
-          </a:p>
-        </p:txBody>
-      </p:sp>
-      <p:pic>
-        <p:nvPicPr>
-          <p:cNvPr id="9" name="Image 2" descr="preencoded.png"/>
-          <p:cNvPicPr>
-            <a:picLocks noChangeAspect="1"/>
-          </p:cNvPicPr>
-          <p:nvPr/>
-        </p:nvPicPr>
-        <p:blipFill>
-          <a:blip r:embed="rId5"/>
-          <a:stretch>
-            <a:fillRect/>
-          </a:stretch>
-        </p:blipFill>
-        <p:spPr>
-          <a:xfrm>
-            <a:off x="9488924" y="3044547"/>
-            <a:ext cx="4347567" cy="907256"/>
-          </a:xfrm>
-          <a:prstGeom prst="rect">
-            <a:avLst/>
-          </a:prstGeom>
-        </p:spPr>
-      </p:pic>
-      <p:sp>
-        <p:nvSpPr>
-          <p:cNvPr id="10" name="Text 5"/>
-          <p:cNvSpPr/>
-          <p:nvPr/>
-        </p:nvSpPr>
-        <p:spPr>
-          <a:xfrm>
-            <a:off x="9715738" y="4178617"/>
-            <a:ext cx="3866674" cy="354330"/>
-          </a:xfrm>
-          <a:prstGeom prst="rect">
-            <a:avLst/>
-          </a:prstGeom>
-          <a:noFill/>
-          <a:ln/>
-        </p:spPr>
-        <p:txBody>
-          <a:bodyPr wrap="none" lIns="0" tIns="0" rIns="0" bIns="0" rtlCol="0" anchor="t"/>
-          <a:lstStyle/>
-          <a:p>
-            <a:pPr marL="0" indent="0" algn="l">
-              <a:lnSpc>
-                <a:spcPts val="2750"/>
-              </a:lnSpc>
-              <a:buNone/>
-            </a:pPr>
-            <a:r>
-              <a:rPr lang="en-US" sz="2200" dirty="0">
-                <a:solidFill>
-                  <a:srgbClr val="3C3939"/>
-                </a:solidFill>
-                <a:latin typeface="Raleway" pitchFamily="34" charset="0"/>
-                <a:ea typeface="Raleway" pitchFamily="34" charset="-122"/>
-                <a:cs typeface="Raleway" pitchFamily="34" charset="-120"/>
-              </a:rPr>
-              <a:t>Support Data-Driven Strategy</a:t>
-            </a:r>
-            <a:endParaRPr lang="en-US" sz="2200" dirty="0"/>
-          </a:p>
-        </p:txBody>
-      </p:sp>
-      <p:sp>
-        <p:nvSpPr>
-          <p:cNvPr id="11" name="Text 6"/>
-          <p:cNvSpPr/>
-          <p:nvPr/>
-        </p:nvSpPr>
-        <p:spPr>
-          <a:xfrm>
-            <a:off x="9715738" y="4669036"/>
-            <a:ext cx="3893939" cy="1451610"/>
-          </a:xfrm>
-          <a:prstGeom prst="rect">
-            <a:avLst/>
-          </a:prstGeom>
-          <a:noFill/>
-          <a:ln/>
-        </p:spPr>
-        <p:txBody>
-          <a:bodyPr wrap="square" lIns="0" tIns="0" rIns="0" bIns="0" rtlCol="0" anchor="t"/>
-          <a:lstStyle/>
-          <a:p>
-            <a:pPr marL="0" indent="0" algn="l">
-              <a:lnSpc>
-                <a:spcPts val="2850"/>
-              </a:lnSpc>
-              <a:buNone/>
-            </a:pPr>
-            <a:r>
-              <a:rPr lang="en-US" sz="1750" dirty="0">
-                <a:solidFill>
-                  <a:srgbClr val="3C3939"/>
-                </a:solidFill>
-                <a:latin typeface="Roboto" pitchFamily="34" charset="0"/>
-                <a:ea typeface="Roboto" pitchFamily="34" charset="-122"/>
-                <a:cs typeface="Roboto" pitchFamily="34" charset="-120"/>
-              </a:rPr>
-              <a:t>Enable sales and marketing teams with </a:t>
-            </a:r>
-            <a:r>
-              <a:rPr lang="en-US" sz="1750" b="1" dirty="0">
-                <a:solidFill>
-                  <a:srgbClr val="3C3939"/>
-                </a:solidFill>
-                <a:latin typeface="Roboto" pitchFamily="34" charset="0"/>
-                <a:ea typeface="Roboto" pitchFamily="34" charset="-122"/>
-                <a:cs typeface="Roboto" pitchFamily="34" charset="-120"/>
-              </a:rPr>
-              <a:t>actionable insights</a:t>
-            </a:r>
-            <a:r>
-              <a:rPr lang="en-US" sz="1750" dirty="0">
-                <a:solidFill>
-                  <a:srgbClr val="3C3939"/>
-                </a:solidFill>
-                <a:latin typeface="Roboto" pitchFamily="34" charset="0"/>
-                <a:ea typeface="Roboto" pitchFamily="34" charset="-122"/>
-                <a:cs typeface="Roboto" pitchFamily="34" charset="-120"/>
-              </a:rPr>
-              <a:t> for optimized lead nurturing and outreach strategies.</a:t>
-            </a:r>
-            <a:endParaRPr lang="en-US" sz="1750" dirty="0"/>
-          </a:p>
-        </p:txBody>
-      </p:sp>
-      <p:pic>
-        <p:nvPicPr>
-          <p:cNvPr id="12" name="Picture 11">
-            <a:extLst>
-              <a:ext uri="{FF2B5EF4-FFF2-40B4-BE49-F238E27FC236}">
-                <a16:creationId xmlns:a16="http://schemas.microsoft.com/office/drawing/2014/main" id="{63D78C42-19AF-6E60-5F1A-36446F539446}"/>
-              </a:ext>
-            </a:extLst>
-          </p:cNvPr>
-          <p:cNvPicPr>
-            <a:picLocks noChangeAspect="1"/>
-          </p:cNvPicPr>
-          <p:nvPr/>
-        </p:nvPicPr>
-        <p:blipFill>
-          <a:blip r:embed="rId6"/>
-          <a:stretch>
-            <a:fillRect/>
-          </a:stretch>
-        </p:blipFill>
-        <p:spPr>
-          <a:xfrm>
-            <a:off x="12316342" y="7790107"/>
-            <a:ext cx="2314058" cy="385676"/>
+            <a:off x="12248818" y="7572894"/>
+            <a:ext cx="2381582" cy="638264"/>
           </a:xfrm>
           <a:prstGeom prst="rect">
             <a:avLst/>
@@ -4041,6 +5583,493 @@
 </file>
 
 <file path=ppt/slides/slide4.xml><?xml version="1.0" encoding="utf-8"?>
+<p:sld xmlns:a="http://schemas.openxmlformats.org/drawingml/2006/main" xmlns:r="http://schemas.openxmlformats.org/officeDocument/2006/relationships" xmlns:p="http://schemas.openxmlformats.org/presentationml/2006/main">
+  <p:cSld>
+    <p:spTree>
+      <p:nvGrpSpPr>
+        <p:cNvPr id="1" name=""/>
+        <p:cNvGrpSpPr/>
+        <p:nvPr/>
+      </p:nvGrpSpPr>
+      <p:grpSpPr>
+        <a:xfrm>
+          <a:off x="0" y="0"/>
+          <a:ext cx="0" cy="0"/>
+          <a:chOff x="0" y="0"/>
+          <a:chExt cx="0" cy="0"/>
+        </a:xfrm>
+      </p:grpSpPr>
+      <p:sp>
+        <p:nvSpPr>
+          <p:cNvPr id="2" name="Text 0"/>
+          <p:cNvSpPr/>
+          <p:nvPr/>
+        </p:nvSpPr>
+        <p:spPr>
+          <a:xfrm>
+            <a:off x="793790" y="1342073"/>
+            <a:ext cx="7845862" cy="708779"/>
+          </a:xfrm>
+          <a:prstGeom prst="rect">
+            <a:avLst/>
+          </a:prstGeom>
+          <a:noFill/>
+          <a:ln/>
+        </p:spPr>
+        <p:txBody>
+          <a:bodyPr wrap="none" lIns="0" tIns="0" rIns="0" bIns="0" rtlCol="0" anchor="t"/>
+          <a:lstStyle/>
+          <a:p>
+            <a:pPr marL="0" indent="0" algn="l">
+              <a:lnSpc>
+                <a:spcPts val="5550"/>
+              </a:lnSpc>
+              <a:buNone/>
+            </a:pPr>
+            <a:r>
+              <a:rPr lang="en-US" sz="4450" dirty="0">
+                <a:solidFill>
+                  <a:srgbClr val="1B1B27"/>
+                </a:solidFill>
+                <a:latin typeface="Raleway" pitchFamily="34" charset="0"/>
+                <a:ea typeface="Raleway" pitchFamily="34" charset="-122"/>
+                <a:cs typeface="Raleway" pitchFamily="34" charset="-120"/>
+              </a:rPr>
+              <a:t>Project Scope &amp; Methodology</a:t>
+            </a:r>
+            <a:endParaRPr lang="en-US" sz="4450" dirty="0"/>
+          </a:p>
+        </p:txBody>
+      </p:sp>
+      <p:pic>
+        <p:nvPicPr>
+          <p:cNvPr id="3" name="Image 0" descr="preencoded.png"/>
+          <p:cNvPicPr>
+            <a:picLocks noChangeAspect="1"/>
+          </p:cNvPicPr>
+          <p:nvPr/>
+        </p:nvPicPr>
+        <p:blipFill>
+          <a:blip r:embed="rId3"/>
+          <a:stretch>
+            <a:fillRect/>
+          </a:stretch>
+        </p:blipFill>
+        <p:spPr>
+          <a:xfrm>
+            <a:off x="793790" y="2504480"/>
+            <a:ext cx="4347567" cy="907256"/>
+          </a:xfrm>
+          <a:prstGeom prst="rect">
+            <a:avLst/>
+          </a:prstGeom>
+        </p:spPr>
+      </p:pic>
+      <p:sp>
+        <p:nvSpPr>
+          <p:cNvPr id="4" name="Text 1"/>
+          <p:cNvSpPr/>
+          <p:nvPr/>
+        </p:nvSpPr>
+        <p:spPr>
+          <a:xfrm>
+            <a:off x="1020604" y="3638550"/>
+            <a:ext cx="3893939" cy="708660"/>
+          </a:xfrm>
+          <a:prstGeom prst="rect">
+            <a:avLst/>
+          </a:prstGeom>
+          <a:noFill/>
+          <a:ln/>
+        </p:spPr>
+        <p:txBody>
+          <a:bodyPr wrap="square" lIns="0" tIns="0" rIns="0" bIns="0" rtlCol="0" anchor="t"/>
+          <a:lstStyle/>
+          <a:p>
+            <a:pPr marL="0" indent="0" algn="l">
+              <a:lnSpc>
+                <a:spcPts val="2750"/>
+              </a:lnSpc>
+              <a:buNone/>
+            </a:pPr>
+            <a:r>
+              <a:rPr lang="en-US" sz="2200" dirty="0">
+                <a:solidFill>
+                  <a:srgbClr val="3C3939"/>
+                </a:solidFill>
+                <a:latin typeface="Raleway" pitchFamily="34" charset="0"/>
+                <a:ea typeface="Raleway" pitchFamily="34" charset="-122"/>
+                <a:cs typeface="Raleway" pitchFamily="34" charset="-120"/>
+              </a:rPr>
+              <a:t>Model Development &amp; Validation</a:t>
+            </a:r>
+            <a:endParaRPr lang="en-US" sz="2200" dirty="0"/>
+          </a:p>
+        </p:txBody>
+      </p:sp>
+      <p:sp>
+        <p:nvSpPr>
+          <p:cNvPr id="5" name="Text 2"/>
+          <p:cNvSpPr/>
+          <p:nvPr/>
+        </p:nvSpPr>
+        <p:spPr>
+          <a:xfrm>
+            <a:off x="1020604" y="4483298"/>
+            <a:ext cx="3893939" cy="2177415"/>
+          </a:xfrm>
+          <a:prstGeom prst="rect">
+            <a:avLst/>
+          </a:prstGeom>
+          <a:noFill/>
+          <a:ln/>
+        </p:spPr>
+        <p:txBody>
+          <a:bodyPr wrap="square" lIns="0" tIns="0" rIns="0" bIns="0" rtlCol="0" anchor="t"/>
+          <a:lstStyle/>
+          <a:p>
+            <a:pPr marL="0" indent="0" algn="l">
+              <a:lnSpc>
+                <a:spcPts val="2850"/>
+              </a:lnSpc>
+              <a:buNone/>
+            </a:pPr>
+            <a:r>
+              <a:rPr lang="en-US" sz="1750" dirty="0">
+                <a:solidFill>
+                  <a:srgbClr val="3C3939"/>
+                </a:solidFill>
+                <a:latin typeface="Roboto" pitchFamily="34" charset="0"/>
+                <a:ea typeface="Roboto" pitchFamily="34" charset="-122"/>
+                <a:cs typeface="Roboto" pitchFamily="34" charset="-120"/>
+              </a:rPr>
+              <a:t>Train and validate a robust machine learning model to </a:t>
+            </a:r>
+            <a:r>
+              <a:rPr lang="en-US" sz="1750" b="1" dirty="0">
+                <a:solidFill>
+                  <a:srgbClr val="3C3939"/>
+                </a:solidFill>
+                <a:latin typeface="Roboto" pitchFamily="34" charset="0"/>
+                <a:ea typeface="Roboto" pitchFamily="34" charset="-122"/>
+                <a:cs typeface="Roboto" pitchFamily="34" charset="-120"/>
+              </a:rPr>
+              <a:t>predict lead conversion probability</a:t>
+            </a:r>
+            <a:r>
+              <a:rPr lang="en-US" sz="1750" dirty="0">
+                <a:solidFill>
+                  <a:srgbClr val="3C3939"/>
+                </a:solidFill>
+                <a:latin typeface="Roboto" pitchFamily="34" charset="0"/>
+                <a:ea typeface="Roboto" pitchFamily="34" charset="-122"/>
+                <a:cs typeface="Roboto" pitchFamily="34" charset="-120"/>
+              </a:rPr>
+              <a:t> using historical sales data. This includes data preprocessing, feature engineering, and model evaluation.</a:t>
+            </a:r>
+            <a:endParaRPr lang="en-US" sz="1750" dirty="0"/>
+          </a:p>
+        </p:txBody>
+      </p:sp>
+      <p:pic>
+        <p:nvPicPr>
+          <p:cNvPr id="6" name="Image 1" descr="preencoded.png"/>
+          <p:cNvPicPr>
+            <a:picLocks noChangeAspect="1"/>
+          </p:cNvPicPr>
+          <p:nvPr/>
+        </p:nvPicPr>
+        <p:blipFill>
+          <a:blip r:embed="rId4"/>
+          <a:stretch>
+            <a:fillRect/>
+          </a:stretch>
+        </p:blipFill>
+        <p:spPr>
+          <a:xfrm>
+            <a:off x="5141357" y="2504480"/>
+            <a:ext cx="4347567" cy="907256"/>
+          </a:xfrm>
+          <a:prstGeom prst="rect">
+            <a:avLst/>
+          </a:prstGeom>
+        </p:spPr>
+      </p:pic>
+      <p:sp>
+        <p:nvSpPr>
+          <p:cNvPr id="7" name="Text 3"/>
+          <p:cNvSpPr/>
+          <p:nvPr/>
+        </p:nvSpPr>
+        <p:spPr>
+          <a:xfrm>
+            <a:off x="5368171" y="3638550"/>
+            <a:ext cx="3886795" cy="354330"/>
+          </a:xfrm>
+          <a:prstGeom prst="rect">
+            <a:avLst/>
+          </a:prstGeom>
+          <a:noFill/>
+          <a:ln/>
+        </p:spPr>
+        <p:txBody>
+          <a:bodyPr wrap="none" lIns="0" tIns="0" rIns="0" bIns="0" rtlCol="0" anchor="t"/>
+          <a:lstStyle/>
+          <a:p>
+            <a:pPr marL="0" indent="0" algn="l">
+              <a:lnSpc>
+                <a:spcPts val="2750"/>
+              </a:lnSpc>
+              <a:buNone/>
+            </a:pPr>
+            <a:r>
+              <a:rPr lang="en-US" sz="2200" dirty="0">
+                <a:solidFill>
+                  <a:srgbClr val="3C3939"/>
+                </a:solidFill>
+                <a:latin typeface="Raleway" pitchFamily="34" charset="0"/>
+                <a:ea typeface="Raleway" pitchFamily="34" charset="-122"/>
+                <a:cs typeface="Raleway" pitchFamily="34" charset="-120"/>
+              </a:rPr>
+              <a:t>Lead Prioritization Framework</a:t>
+            </a:r>
+            <a:endParaRPr lang="en-US" sz="2200" dirty="0"/>
+          </a:p>
+        </p:txBody>
+      </p:sp>
+      <p:sp>
+        <p:nvSpPr>
+          <p:cNvPr id="8" name="Text 4"/>
+          <p:cNvSpPr/>
+          <p:nvPr/>
+        </p:nvSpPr>
+        <p:spPr>
+          <a:xfrm>
+            <a:off x="5368171" y="4128968"/>
+            <a:ext cx="3893939" cy="1814513"/>
+          </a:xfrm>
+          <a:prstGeom prst="rect">
+            <a:avLst/>
+          </a:prstGeom>
+          <a:noFill/>
+          <a:ln/>
+        </p:spPr>
+        <p:txBody>
+          <a:bodyPr wrap="square" lIns="0" tIns="0" rIns="0" bIns="0" rtlCol="0" anchor="t"/>
+          <a:lstStyle/>
+          <a:p>
+            <a:pPr marL="0" indent="0" algn="l">
+              <a:lnSpc>
+                <a:spcPts val="2850"/>
+              </a:lnSpc>
+              <a:buNone/>
+            </a:pPr>
+            <a:r>
+              <a:rPr lang="en-US" sz="1750" dirty="0">
+                <a:solidFill>
+                  <a:srgbClr val="3C3939"/>
+                </a:solidFill>
+                <a:latin typeface="Roboto" pitchFamily="34" charset="0"/>
+                <a:ea typeface="Roboto" pitchFamily="34" charset="-122"/>
+                <a:cs typeface="Roboto" pitchFamily="34" charset="-120"/>
+              </a:rPr>
+              <a:t>Implement a framework to </a:t>
+            </a:r>
+            <a:r>
+              <a:rPr lang="en-US" sz="1750" b="1" dirty="0">
+                <a:solidFill>
+                  <a:srgbClr val="3C3939"/>
+                </a:solidFill>
+                <a:latin typeface="Roboto" pitchFamily="34" charset="0"/>
+                <a:ea typeface="Roboto" pitchFamily="34" charset="-122"/>
+                <a:cs typeface="Roboto" pitchFamily="34" charset="-120"/>
+              </a:rPr>
+              <a:t>categorize new leads</a:t>
+            </a:r>
+            <a:r>
+              <a:rPr lang="en-US" sz="1750" dirty="0">
+                <a:solidFill>
+                  <a:srgbClr val="3C3939"/>
+                </a:solidFill>
+                <a:latin typeface="Roboto" pitchFamily="34" charset="0"/>
+                <a:ea typeface="Roboto" pitchFamily="34" charset="-122"/>
+                <a:cs typeface="Roboto" pitchFamily="34" charset="-120"/>
+              </a:rPr>
+              <a:t> into High, Medium, and Low priority levels, based on the model's predictions. Implement simple User Interface for sales team to use.</a:t>
+            </a:r>
+            <a:endParaRPr lang="en-US" sz="1750" dirty="0"/>
+          </a:p>
+        </p:txBody>
+      </p:sp>
+      <p:pic>
+        <p:nvPicPr>
+          <p:cNvPr id="9" name="Image 2" descr="preencoded.png"/>
+          <p:cNvPicPr>
+            <a:picLocks noChangeAspect="1"/>
+          </p:cNvPicPr>
+          <p:nvPr/>
+        </p:nvPicPr>
+        <p:blipFill>
+          <a:blip r:embed="rId5"/>
+          <a:stretch>
+            <a:fillRect/>
+          </a:stretch>
+        </p:blipFill>
+        <p:spPr>
+          <a:xfrm>
+            <a:off x="9488924" y="2504480"/>
+            <a:ext cx="4347567" cy="907256"/>
+          </a:xfrm>
+          <a:prstGeom prst="rect">
+            <a:avLst/>
+          </a:prstGeom>
+        </p:spPr>
+      </p:pic>
+      <p:sp>
+        <p:nvSpPr>
+          <p:cNvPr id="10" name="Text 5"/>
+          <p:cNvSpPr/>
+          <p:nvPr/>
+        </p:nvSpPr>
+        <p:spPr>
+          <a:xfrm>
+            <a:off x="9715738" y="3638550"/>
+            <a:ext cx="3645337" cy="354330"/>
+          </a:xfrm>
+          <a:prstGeom prst="rect">
+            <a:avLst/>
+          </a:prstGeom>
+          <a:noFill/>
+          <a:ln/>
+        </p:spPr>
+        <p:txBody>
+          <a:bodyPr wrap="none" lIns="0" tIns="0" rIns="0" bIns="0" rtlCol="0" anchor="t"/>
+          <a:lstStyle/>
+          <a:p>
+            <a:pPr marL="0" indent="0" algn="l">
+              <a:lnSpc>
+                <a:spcPts val="2750"/>
+              </a:lnSpc>
+              <a:buNone/>
+            </a:pPr>
+            <a:r>
+              <a:rPr lang="en-US" sz="2200" dirty="0">
+                <a:solidFill>
+                  <a:srgbClr val="3C3939"/>
+                </a:solidFill>
+                <a:latin typeface="Raleway" pitchFamily="34" charset="0"/>
+                <a:ea typeface="Raleway" pitchFamily="34" charset="-122"/>
+                <a:cs typeface="Raleway" pitchFamily="34" charset="-120"/>
+              </a:rPr>
+              <a:t>AWS Cloud Implementation</a:t>
+            </a:r>
+            <a:endParaRPr lang="en-US" sz="2200" dirty="0"/>
+          </a:p>
+        </p:txBody>
+      </p:sp>
+      <p:sp>
+        <p:nvSpPr>
+          <p:cNvPr id="11" name="Text 6"/>
+          <p:cNvSpPr/>
+          <p:nvPr/>
+        </p:nvSpPr>
+        <p:spPr>
+          <a:xfrm>
+            <a:off x="9715738" y="4128968"/>
+            <a:ext cx="3893939" cy="2177415"/>
+          </a:xfrm>
+          <a:prstGeom prst="rect">
+            <a:avLst/>
+          </a:prstGeom>
+          <a:noFill/>
+          <a:ln/>
+        </p:spPr>
+        <p:txBody>
+          <a:bodyPr wrap="square" lIns="0" tIns="0" rIns="0" bIns="0" rtlCol="0" anchor="t"/>
+          <a:lstStyle/>
+          <a:p>
+            <a:pPr marL="0" indent="0" algn="l">
+              <a:lnSpc>
+                <a:spcPts val="2850"/>
+              </a:lnSpc>
+              <a:buNone/>
+            </a:pPr>
+            <a:r>
+              <a:rPr lang="en-US" sz="1750" dirty="0">
+                <a:solidFill>
+                  <a:srgbClr val="3C3939"/>
+                </a:solidFill>
+                <a:latin typeface="Roboto" pitchFamily="34" charset="0"/>
+                <a:ea typeface="Roboto" pitchFamily="34" charset="-122"/>
+                <a:cs typeface="Roboto" pitchFamily="34" charset="-120"/>
+              </a:rPr>
+              <a:t>Implement the entire predictive sales conversion flow within the </a:t>
+            </a:r>
+            <a:r>
+              <a:rPr lang="en-US" sz="1750" b="1" dirty="0">
+                <a:solidFill>
+                  <a:srgbClr val="3C3939"/>
+                </a:solidFill>
+                <a:latin typeface="Roboto" pitchFamily="34" charset="0"/>
+                <a:ea typeface="Roboto" pitchFamily="34" charset="-122"/>
+                <a:cs typeface="Roboto" pitchFamily="34" charset="-120"/>
+              </a:rPr>
+              <a:t>AWS cloud ecosystem</a:t>
+            </a:r>
+            <a:r>
+              <a:rPr lang="en-US" sz="1750" dirty="0">
+                <a:solidFill>
+                  <a:srgbClr val="3C3939"/>
+                </a:solidFill>
+                <a:latin typeface="Roboto" pitchFamily="34" charset="0"/>
+                <a:ea typeface="Roboto" pitchFamily="34" charset="-122"/>
+                <a:cs typeface="Roboto" pitchFamily="34" charset="-120"/>
+              </a:rPr>
+              <a:t>, ensuring scalability, security, and robust performance for all components and seamless integration into existing workflows.</a:t>
+            </a:r>
+            <a:endParaRPr lang="en-US" sz="1750" dirty="0"/>
+          </a:p>
+        </p:txBody>
+      </p:sp>
+      <p:pic>
+        <p:nvPicPr>
+          <p:cNvPr id="16" name="Picture 15">
+            <a:extLst>
+              <a:ext uri="{FF2B5EF4-FFF2-40B4-BE49-F238E27FC236}">
+                <a16:creationId xmlns:a16="http://schemas.microsoft.com/office/drawing/2014/main" id="{E565CDAE-07DE-35F8-0C50-9565367F4CFC}"/>
+              </a:ext>
+            </a:extLst>
+          </p:cNvPr>
+          <p:cNvPicPr>
+            <a:picLocks noChangeAspect="1"/>
+          </p:cNvPicPr>
+          <p:nvPr/>
+        </p:nvPicPr>
+        <p:blipFill>
+          <a:blip r:embed="rId6"/>
+          <a:stretch>
+            <a:fillRect/>
+          </a:stretch>
+        </p:blipFill>
+        <p:spPr>
+          <a:xfrm>
+            <a:off x="12170450" y="7501438"/>
+            <a:ext cx="2381250" cy="638175"/>
+          </a:xfrm>
+          <a:prstGeom prst="rect">
+            <a:avLst/>
+          </a:prstGeom>
+        </p:spPr>
+      </p:pic>
+    </p:spTree>
+  </p:cSld>
+  <p:clrMapOvr>
+    <a:masterClrMapping/>
+  </p:clrMapOvr>
+</p:sld>
+</file>
+
+<file path=ppt/slides/slide5.xml><?xml version="1.0" encoding="utf-8"?>
 <p:sld xmlns:a="http://schemas.openxmlformats.org/drawingml/2006/main" xmlns:r="http://schemas.openxmlformats.org/officeDocument/2006/relationships" xmlns:p="http://schemas.openxmlformats.org/presentationml/2006/main">
   <p:cSld name="Slide 4">
     <p:spTree>
@@ -4093,7 +6122,7 @@
                 <a:ea typeface="Raleway" pitchFamily="34" charset="-122"/>
                 <a:cs typeface="Raleway" pitchFamily="34" charset="-120"/>
               </a:rPr>
-              <a:t>Dataset Overview: The Foundation of Our Model</a:t>
+              <a:t>Dataset Overview: Foundation of the Model</a:t>
             </a:r>
             <a:endParaRPr lang="en-US" sz="4050" dirty="0"/>
           </a:p>
@@ -4134,7 +6163,7 @@
                 <a:ea typeface="Roboto" pitchFamily="34" charset="-122"/>
                 <a:cs typeface="Roboto" pitchFamily="34" charset="-120"/>
               </a:rPr>
-              <a:t>Our model is built upon a comprehensive dataset sourced from the   </a:t>
+              <a:t>The model is built upon a comprehensive dataset sourced from the   </a:t>
             </a:r>
             <a:r>
               <a:rPr lang="en-US" sz="1600" b="1" dirty="0">
@@ -4447,67 +6476,13 @@
       </p:sp>
       <p:sp>
         <p:nvSpPr>
-          <p:cNvPr id="9" name="Text 7"/>
-          <p:cNvSpPr/>
-          <p:nvPr/>
-        </p:nvSpPr>
-        <p:spPr>
-          <a:xfrm>
-            <a:off x="721638" y="6481547"/>
-            <a:ext cx="6342102" cy="329922"/>
-          </a:xfrm>
-          <a:prstGeom prst="rect">
-            <a:avLst/>
-          </a:prstGeom>
-          <a:noFill/>
-          <a:ln/>
-        </p:spPr>
-        <p:txBody>
-          <a:bodyPr wrap="none" lIns="0" tIns="0" rIns="0" bIns="0" rtlCol="0" anchor="t"/>
-          <a:lstStyle/>
-          <a:p>
-            <a:pPr marL="342900" indent="-342900" algn="l">
-              <a:lnSpc>
-                <a:spcPts val="2550"/>
-              </a:lnSpc>
-              <a:buSzPct val="100000"/>
-              <a:buChar char="•"/>
-            </a:pPr>
-            <a:r>
-              <a:rPr lang="en-US" sz="1600" b="1" dirty="0">
-                <a:solidFill>
-                  <a:srgbClr val="3C3939"/>
-                </a:solidFill>
-                <a:latin typeface="Roboto" pitchFamily="34" charset="0"/>
-                <a:ea typeface="Roboto" pitchFamily="34" charset="-122"/>
-                <a:cs typeface="Roboto" pitchFamily="34" charset="-120"/>
-              </a:rPr>
-              <a:t>Converted:</a:t>
-            </a:r>
-            <a:r>
-              <a:rPr lang="en-US" sz="1600" dirty="0">
-                <a:solidFill>
-                  <a:srgbClr val="3C3939"/>
-                </a:solidFill>
-                <a:latin typeface="Roboto" pitchFamily="34" charset="0"/>
-                <a:ea typeface="Roboto" pitchFamily="34" charset="-122"/>
-                <a:cs typeface="Roboto" pitchFamily="34" charset="-120"/>
-              </a:rPr>
-              <a:t> The target variable (binary: Yes/No).</a:t>
-            </a:r>
-            <a:endParaRPr lang="en-US" sz="1600" dirty="0"/>
-          </a:p>
-        </p:txBody>
-      </p:sp>
-      <p:sp>
-        <p:nvSpPr>
           <p:cNvPr id="10" name="Text 8"/>
           <p:cNvSpPr/>
           <p:nvPr/>
         </p:nvSpPr>
         <p:spPr>
           <a:xfrm>
-            <a:off x="721638" y="6965553"/>
+            <a:off x="714018" y="6409491"/>
             <a:ext cx="6342102" cy="329922"/>
           </a:xfrm>
           <a:prstGeom prst="rect">
@@ -4742,7 +6717,7 @@
 </p:sld>
 </file>
 
-<file path=ppt/slides/slide5.xml><?xml version="1.0" encoding="utf-8"?>
+<file path=ppt/slides/slide6.xml><?xml version="1.0" encoding="utf-8"?>
 <p:sld xmlns:a="http://schemas.openxmlformats.org/drawingml/2006/main" xmlns:r="http://schemas.openxmlformats.org/officeDocument/2006/relationships" xmlns:p="http://schemas.openxmlformats.org/presentationml/2006/main">
   <p:cSld name="Slide 5">
     <p:spTree>
@@ -5891,7 +7866,7 @@
 </p:sld>
 </file>
 
-<file path=ppt/slides/slide6.xml><?xml version="1.0" encoding="utf-8"?>
+<file path=ppt/slides/slide7.xml><?xml version="1.0" encoding="utf-8"?>
 <p:sld xmlns:a="http://schemas.openxmlformats.org/drawingml/2006/main" xmlns:r="http://schemas.openxmlformats.org/officeDocument/2006/relationships" xmlns:p="http://schemas.openxmlformats.org/presentationml/2006/main">
   <p:cSld name="Slide 6">
     <p:spTree>
@@ -6318,7 +8293,7 @@
         </p:nvSpPr>
         <p:spPr>
           <a:xfrm>
-            <a:off x="9043318" y="3388995"/>
+            <a:off x="9043318" y="3598621"/>
             <a:ext cx="4885015" cy="1451610"/>
           </a:xfrm>
           <a:prstGeom prst="rect">
@@ -6425,7 +8400,7 @@
 </p:sld>
 </file>
 
-<file path=ppt/slides/slide7.xml><?xml version="1.0" encoding="utf-8"?>
+<file path=ppt/slides/slide8.xml><?xml version="1.0" encoding="utf-8"?>
 <p:sld xmlns:a="http://schemas.openxmlformats.org/drawingml/2006/main" xmlns:r="http://schemas.openxmlformats.org/officeDocument/2006/relationships" xmlns:p="http://schemas.openxmlformats.org/presentationml/2006/main">
   <p:cSld name="Slide 8">
     <p:spTree>
@@ -6995,7 +8970,7 @@
 </p:sld>
 </file>
 
-<file path=ppt/slides/slide8.xml><?xml version="1.0" encoding="utf-8"?>
+<file path=ppt/slides/slide9.xml><?xml version="1.0" encoding="utf-8"?>
 <p:sld xmlns:a="http://schemas.openxmlformats.org/drawingml/2006/main" xmlns:r="http://schemas.openxmlformats.org/officeDocument/2006/relationships" xmlns:p="http://schemas.openxmlformats.org/presentationml/2006/main">
   <p:cSld name="Slide 7">
     <p:spTree>
@@ -7012,43 +8987,6 @@
           <a:chExt cx="0" cy="0"/>
         </a:xfrm>
       </p:grpSpPr>
-      <p:sp>
-        <p:nvSpPr>
-          <p:cNvPr id="7" name="TextBox 6">
-            <a:extLst>
-              <a:ext uri="{FF2B5EF4-FFF2-40B4-BE49-F238E27FC236}">
-                <a16:creationId xmlns:a16="http://schemas.microsoft.com/office/drawing/2014/main" id="{60113881-5E8D-C4D7-ECF7-F98CE28CBA0A}"/>
-              </a:ext>
-            </a:extLst>
-          </p:cNvPr>
-          <p:cNvSpPr txBox="1"/>
-          <p:nvPr/>
-        </p:nvSpPr>
-        <p:spPr>
-          <a:xfrm>
-            <a:off x="336884" y="320387"/>
-            <a:ext cx="4391527" cy="830997"/>
-          </a:xfrm>
-          <a:prstGeom prst="rect">
-            <a:avLst/>
-          </a:prstGeom>
-          <a:noFill/>
-        </p:spPr>
-        <p:txBody>
-          <a:bodyPr wrap="square" rtlCol="0">
-            <a:spAutoFit/>
-          </a:bodyPr>
-          <a:lstStyle/>
-          <a:p>
-            <a:r>
-              <a:rPr lang="en-IN" sz="2400" b="1" dirty="0">
-                <a:latin typeface="Raleway" pitchFamily="2" charset="0"/>
-              </a:rPr>
-              <a:t>Architecture Diagram in AWS Cloud Implementation:</a:t>
-            </a:r>
-          </a:p>
-        </p:txBody>
-      </p:sp>
       <p:pic>
         <p:nvPicPr>
           <p:cNvPr id="10" name="Picture 9">
@@ -7079,12 +9017,76 @@
           </a:prstGeom>
         </p:spPr>
       </p:pic>
+      <p:sp>
+        <p:nvSpPr>
+          <p:cNvPr id="5" name="Text 0">
+            <a:extLst>
+              <a:ext uri="{FF2B5EF4-FFF2-40B4-BE49-F238E27FC236}">
+                <a16:creationId xmlns:a16="http://schemas.microsoft.com/office/drawing/2014/main" id="{0ABD8EB1-EAE7-DA3F-D707-4DC82F9DEC5C}"/>
+              </a:ext>
+            </a:extLst>
+          </p:cNvPr>
+          <p:cNvSpPr/>
+          <p:nvPr/>
+        </p:nvSpPr>
+        <p:spPr>
+          <a:xfrm>
+            <a:off x="216569" y="216569"/>
+            <a:ext cx="4235116" cy="2322094"/>
+          </a:xfrm>
+          <a:prstGeom prst="rect">
+            <a:avLst/>
+          </a:prstGeom>
+          <a:noFill/>
+          <a:ln/>
+        </p:spPr>
+        <p:txBody>
+          <a:bodyPr wrap="none" lIns="0" tIns="0" rIns="0" bIns="0" rtlCol="0" anchor="t"/>
+          <a:lstStyle/>
+          <a:p>
+            <a:pPr>
+              <a:lnSpc>
+                <a:spcPts val="5000"/>
+              </a:lnSpc>
+            </a:pPr>
+            <a:r>
+              <a:rPr lang="en-US" sz="2400" dirty="0">
+                <a:solidFill>
+                  <a:srgbClr val="1B1B27"/>
+                </a:solidFill>
+                <a:latin typeface="Raleway" pitchFamily="34" charset="0"/>
+                <a:ea typeface="Raleway" pitchFamily="34" charset="-122"/>
+                <a:cs typeface="Raleway" pitchFamily="34" charset="-120"/>
+              </a:rPr>
+              <a:t>Architecture Diagram </a:t>
+            </a:r>
+          </a:p>
+          <a:p>
+            <a:pPr>
+              <a:lnSpc>
+                <a:spcPts val="5000"/>
+              </a:lnSpc>
+            </a:pPr>
+            <a:r>
+              <a:rPr lang="en-US" sz="2400" dirty="0">
+                <a:solidFill>
+                  <a:srgbClr val="1B1B27"/>
+                </a:solidFill>
+                <a:latin typeface="Raleway" pitchFamily="34" charset="0"/>
+                <a:ea typeface="Raleway" pitchFamily="34" charset="-122"/>
+                <a:cs typeface="Raleway" pitchFamily="34" charset="-120"/>
+              </a:rPr>
+              <a:t>in AWS Cloud Implementation:</a:t>
+            </a:r>
+          </a:p>
+        </p:txBody>
+      </p:sp>
       <p:pic>
         <p:nvPicPr>
-          <p:cNvPr id="12" name="Picture 11" descr="A diagram of a company&#10;&#10;AI-generated content may be incorrect.">
+          <p:cNvPr id="8" name="Picture 7" descr="A diagram of a company&#10;&#10;AI-generated content may be incorrect.">
             <a:extLst>
               <a:ext uri="{FF2B5EF4-FFF2-40B4-BE49-F238E27FC236}">
-                <a16:creationId xmlns:a16="http://schemas.microsoft.com/office/drawing/2014/main" id="{185394BE-DF6D-38F4-11F1-CD8CF9625938}"/>
+                <a16:creationId xmlns:a16="http://schemas.microsoft.com/office/drawing/2014/main" id="{1E09C1CD-924F-FD14-C652-1687A2D6FE7B}"/>
               </a:ext>
             </a:extLst>
           </p:cNvPr>
@@ -7101,804 +9103,8 @@
         </p:blipFill>
         <p:spPr>
           <a:xfrm>
-            <a:off x="4728411" y="0"/>
-            <a:ext cx="5989791" cy="8229600"/>
-          </a:xfrm>
-          <a:prstGeom prst="rect">
-            <a:avLst/>
-          </a:prstGeom>
-        </p:spPr>
-      </p:pic>
-    </p:spTree>
-  </p:cSld>
-  <p:clrMapOvr>
-    <a:masterClrMapping/>
-  </p:clrMapOvr>
-</p:sld>
-</file>
-
-<file path=ppt/slides/slide9.xml><?xml version="1.0" encoding="utf-8"?>
-<p:sld xmlns:a="http://schemas.openxmlformats.org/drawingml/2006/main" xmlns:r="http://schemas.openxmlformats.org/officeDocument/2006/relationships" xmlns:p="http://schemas.openxmlformats.org/presentationml/2006/main">
-  <p:cSld name="Slide 9">
-    <p:spTree>
-      <p:nvGrpSpPr>
-        <p:cNvPr id="1" name=""/>
-        <p:cNvGrpSpPr/>
-        <p:nvPr/>
-      </p:nvGrpSpPr>
-      <p:grpSpPr>
-        <a:xfrm>
-          <a:off x="0" y="0"/>
-          <a:ext cx="0" cy="0"/>
-          <a:chOff x="0" y="0"/>
-          <a:chExt cx="0" cy="0"/>
-        </a:xfrm>
-      </p:grpSpPr>
-      <p:sp>
-        <p:nvSpPr>
-          <p:cNvPr id="2" name="Text 0"/>
-          <p:cNvSpPr/>
-          <p:nvPr/>
-        </p:nvSpPr>
-        <p:spPr>
-          <a:xfrm>
-            <a:off x="793790" y="1062871"/>
-            <a:ext cx="9202579" cy="708779"/>
-          </a:xfrm>
-          <a:prstGeom prst="rect">
-            <a:avLst/>
-          </a:prstGeom>
-          <a:noFill/>
-          <a:ln/>
-        </p:spPr>
-        <p:txBody>
-          <a:bodyPr wrap="none" lIns="0" tIns="0" rIns="0" bIns="0" rtlCol="0" anchor="t"/>
-          <a:lstStyle/>
-          <a:p>
-            <a:pPr marL="0" indent="0" algn="l">
-              <a:lnSpc>
-                <a:spcPts val="5550"/>
-              </a:lnSpc>
-              <a:buNone/>
-            </a:pPr>
-            <a:r>
-              <a:rPr lang="en-US" sz="4450" dirty="0">
-                <a:solidFill>
-                  <a:srgbClr val="1B1B27"/>
-                </a:solidFill>
-                <a:latin typeface="Raleway" pitchFamily="34" charset="0"/>
-                <a:ea typeface="Raleway" pitchFamily="34" charset="-122"/>
-                <a:cs typeface="Raleway" pitchFamily="34" charset="-120"/>
-              </a:rPr>
-              <a:t>Automated Monitoring &amp; Retraining</a:t>
-            </a:r>
-            <a:endParaRPr lang="en-US" sz="4450" dirty="0"/>
-          </a:p>
-        </p:txBody>
-      </p:sp>
-      <p:sp>
-        <p:nvSpPr>
-          <p:cNvPr id="3" name="Text 1"/>
-          <p:cNvSpPr/>
-          <p:nvPr/>
-        </p:nvSpPr>
-        <p:spPr>
-          <a:xfrm>
-            <a:off x="793790" y="2225278"/>
-            <a:ext cx="3898702" cy="708660"/>
-          </a:xfrm>
-          <a:prstGeom prst="rect">
-            <a:avLst/>
-          </a:prstGeom>
-          <a:noFill/>
-          <a:ln/>
-        </p:spPr>
-        <p:txBody>
-          <a:bodyPr wrap="square" lIns="0" tIns="0" rIns="0" bIns="0" rtlCol="0" anchor="t"/>
-          <a:lstStyle/>
-          <a:p>
-            <a:pPr marL="0" indent="0" algn="r">
-              <a:lnSpc>
-                <a:spcPts val="2750"/>
-              </a:lnSpc>
-              <a:buNone/>
-            </a:pPr>
-            <a:r>
-              <a:rPr lang="en-US" sz="2200" dirty="0">
-                <a:solidFill>
-                  <a:srgbClr val="3C3939"/>
-                </a:solidFill>
-                <a:latin typeface="Raleway" pitchFamily="34" charset="0"/>
-                <a:ea typeface="Raleway" pitchFamily="34" charset="-122"/>
-                <a:cs typeface="Raleway" pitchFamily="34" charset="-120"/>
-              </a:rPr>
-              <a:t>Drift Detection with Evidently AI</a:t>
-            </a:r>
-            <a:endParaRPr lang="en-US" sz="2200" dirty="0"/>
-          </a:p>
-        </p:txBody>
-      </p:sp>
-      <p:sp>
-        <p:nvSpPr>
-          <p:cNvPr id="4" name="Text 2"/>
-          <p:cNvSpPr/>
-          <p:nvPr/>
-        </p:nvSpPr>
-        <p:spPr>
-          <a:xfrm>
-            <a:off x="793790" y="3070027"/>
-            <a:ext cx="3898702" cy="1451610"/>
-          </a:xfrm>
-          <a:prstGeom prst="rect">
-            <a:avLst/>
-          </a:prstGeom>
-          <a:noFill/>
-          <a:ln/>
-        </p:spPr>
-        <p:txBody>
-          <a:bodyPr wrap="square" lIns="0" tIns="0" rIns="0" bIns="0" rtlCol="0" anchor="t"/>
-          <a:lstStyle/>
-          <a:p>
-            <a:pPr marL="0" indent="0" algn="r">
-              <a:lnSpc>
-                <a:spcPts val="2850"/>
-              </a:lnSpc>
-              <a:buNone/>
-            </a:pPr>
-            <a:r>
-              <a:rPr lang="en-US" sz="1750" dirty="0">
-                <a:solidFill>
-                  <a:srgbClr val="3C3939"/>
-                </a:solidFill>
-                <a:latin typeface="Roboto" pitchFamily="34" charset="0"/>
-                <a:ea typeface="Roboto" pitchFamily="34" charset="-122"/>
-                <a:cs typeface="Roboto" pitchFamily="34" charset="-120"/>
-              </a:rPr>
-              <a:t>We use </a:t>
-            </a:r>
-            <a:r>
-              <a:rPr lang="en-US" sz="1750" b="1" dirty="0">
-                <a:solidFill>
-                  <a:srgbClr val="3C3939"/>
-                </a:solidFill>
-                <a:latin typeface="Roboto" pitchFamily="34" charset="0"/>
-                <a:ea typeface="Roboto" pitchFamily="34" charset="-122"/>
-                <a:cs typeface="Roboto" pitchFamily="34" charset="-120"/>
-              </a:rPr>
-              <a:t>Evidently AI</a:t>
-            </a:r>
-            <a:r>
-              <a:rPr lang="en-US" sz="1750" dirty="0">
-                <a:solidFill>
-                  <a:srgbClr val="3C3939"/>
-                </a:solidFill>
-                <a:latin typeface="Roboto" pitchFamily="34" charset="0"/>
-                <a:ea typeface="Roboto" pitchFamily="34" charset="-122"/>
-                <a:cs typeface="Roboto" pitchFamily="34" charset="-120"/>
-              </a:rPr>
-              <a:t> to continuously monitor for </a:t>
-            </a:r>
-            <a:r>
-              <a:rPr lang="en-US" sz="1750" b="1" dirty="0">
-                <a:solidFill>
-                  <a:srgbClr val="3C3939"/>
-                </a:solidFill>
-                <a:latin typeface="Roboto" pitchFamily="34" charset="0"/>
-                <a:ea typeface="Roboto" pitchFamily="34" charset="-122"/>
-                <a:cs typeface="Roboto" pitchFamily="34" charset="-120"/>
-              </a:rPr>
-              <a:t>data and concept drift</a:t>
-            </a:r>
-            <a:r>
-              <a:rPr lang="en-US" sz="1750" dirty="0">
-                <a:solidFill>
-                  <a:srgbClr val="3C3939"/>
-                </a:solidFill>
-                <a:latin typeface="Roboto" pitchFamily="34" charset="0"/>
-                <a:ea typeface="Roboto" pitchFamily="34" charset="-122"/>
-                <a:cs typeface="Roboto" pitchFamily="34" charset="-120"/>
-              </a:rPr>
-              <a:t> by comparing new incoming data to the training dataset's characteristics.</a:t>
-            </a:r>
-            <a:endParaRPr lang="en-US" sz="1750" dirty="0"/>
-          </a:p>
-        </p:txBody>
-      </p:sp>
-      <p:pic>
-        <p:nvPicPr>
-          <p:cNvPr id="5" name="Image 0" descr="preencoded.png"/>
-          <p:cNvPicPr>
-            <a:picLocks noChangeAspect="1"/>
-          </p:cNvPicPr>
-          <p:nvPr/>
-        </p:nvPicPr>
-        <p:blipFill>
-          <a:blip r:embed="rId3"/>
-          <a:stretch>
-            <a:fillRect/>
-          </a:stretch>
-        </p:blipFill>
-        <p:spPr>
-          <a:xfrm>
-            <a:off x="5032653" y="2413516"/>
-            <a:ext cx="4564975" cy="4564975"/>
-          </a:xfrm>
-          <a:prstGeom prst="rect">
-            <a:avLst/>
-          </a:prstGeom>
-        </p:spPr>
-      </p:pic>
-      <p:sp>
-        <p:nvSpPr>
-          <p:cNvPr id="6" name="Text 3"/>
-          <p:cNvSpPr/>
-          <p:nvPr/>
-        </p:nvSpPr>
-        <p:spPr>
-          <a:xfrm>
-            <a:off x="6226731" y="3176588"/>
-            <a:ext cx="339328" cy="424220"/>
-          </a:xfrm>
-          <a:prstGeom prst="rect">
-            <a:avLst/>
-          </a:prstGeom>
-          <a:noFill/>
-          <a:ln/>
-        </p:spPr>
-        <p:txBody>
-          <a:bodyPr wrap="none" lIns="0" tIns="0" rIns="0" bIns="0" rtlCol="0" anchor="t"/>
-          <a:lstStyle/>
-          <a:p>
-            <a:pPr marL="0" indent="0" algn="l">
-              <a:lnSpc>
-                <a:spcPts val="4250"/>
-              </a:lnSpc>
-              <a:buNone/>
-            </a:pPr>
-            <a:r>
-              <a:rPr lang="en-US" sz="2650" dirty="0">
-                <a:solidFill>
-                  <a:srgbClr val="3C3939"/>
-                </a:solidFill>
-                <a:latin typeface="Raleway" pitchFamily="34" charset="0"/>
-                <a:ea typeface="Raleway" pitchFamily="34" charset="-122"/>
-                <a:cs typeface="Raleway" pitchFamily="34" charset="-120"/>
-              </a:rPr>
-              <a:t>1</a:t>
-            </a:r>
-            <a:endParaRPr lang="en-US" sz="2650" dirty="0"/>
-          </a:p>
-        </p:txBody>
-      </p:sp>
-      <p:sp>
-        <p:nvSpPr>
-          <p:cNvPr id="7" name="Text 4"/>
-          <p:cNvSpPr/>
-          <p:nvPr/>
-        </p:nvSpPr>
-        <p:spPr>
-          <a:xfrm>
-            <a:off x="9937790" y="2225278"/>
-            <a:ext cx="3898821" cy="708660"/>
-          </a:xfrm>
-          <a:prstGeom prst="rect">
-            <a:avLst/>
-          </a:prstGeom>
-          <a:noFill/>
-          <a:ln/>
-        </p:spPr>
-        <p:txBody>
-          <a:bodyPr wrap="square" lIns="0" tIns="0" rIns="0" bIns="0" rtlCol="0" anchor="t"/>
-          <a:lstStyle/>
-          <a:p>
-            <a:pPr marL="0" indent="0" algn="l">
-              <a:lnSpc>
-                <a:spcPts val="2750"/>
-              </a:lnSpc>
-              <a:buNone/>
-            </a:pPr>
-            <a:r>
-              <a:rPr lang="en-US" sz="2200" dirty="0">
-                <a:solidFill>
-                  <a:srgbClr val="3C3939"/>
-                </a:solidFill>
-                <a:latin typeface="Raleway" pitchFamily="34" charset="0"/>
-                <a:ea typeface="Raleway" pitchFamily="34" charset="-122"/>
-                <a:cs typeface="Raleway" pitchFamily="34" charset="-120"/>
-              </a:rPr>
-              <a:t>Airflow DAGs for Orchestration</a:t>
-            </a:r>
-            <a:endParaRPr lang="en-US" sz="2200" dirty="0"/>
-          </a:p>
-        </p:txBody>
-      </p:sp>
-      <p:sp>
-        <p:nvSpPr>
-          <p:cNvPr id="8" name="Text 5"/>
-          <p:cNvSpPr/>
-          <p:nvPr/>
-        </p:nvSpPr>
-        <p:spPr>
-          <a:xfrm>
-            <a:off x="9937790" y="3070027"/>
-            <a:ext cx="3898821" cy="1451610"/>
-          </a:xfrm>
-          <a:prstGeom prst="rect">
-            <a:avLst/>
-          </a:prstGeom>
-          <a:noFill/>
-          <a:ln/>
-        </p:spPr>
-        <p:txBody>
-          <a:bodyPr wrap="square" lIns="0" tIns="0" rIns="0" bIns="0" rtlCol="0" anchor="t"/>
-          <a:lstStyle/>
-          <a:p>
-            <a:pPr marL="0" indent="0" algn="l">
-              <a:lnSpc>
-                <a:spcPts val="2850"/>
-              </a:lnSpc>
-              <a:buNone/>
-            </a:pPr>
-            <a:r>
-              <a:rPr lang="en-US" sz="1750" b="1" dirty="0">
-                <a:solidFill>
-                  <a:srgbClr val="3C3939"/>
-                </a:solidFill>
-                <a:latin typeface="Roboto" pitchFamily="34" charset="0"/>
-                <a:ea typeface="Roboto" pitchFamily="34" charset="-122"/>
-                <a:cs typeface="Roboto" pitchFamily="34" charset="-120"/>
-              </a:rPr>
-              <a:t>Apache Airflow DAGs</a:t>
-            </a:r>
-            <a:r>
-              <a:rPr lang="en-US" sz="1750" dirty="0">
-                <a:solidFill>
-                  <a:srgbClr val="3C3939"/>
-                </a:solidFill>
-                <a:latin typeface="Roboto" pitchFamily="34" charset="0"/>
-                <a:ea typeface="Roboto" pitchFamily="34" charset="-122"/>
-                <a:cs typeface="Roboto" pitchFamily="34" charset="-120"/>
-              </a:rPr>
-              <a:t> (Directed Acyclic Graphs) are configured to automate the monitoring process and trigger subsequent actions.</a:t>
-            </a:r>
-            <a:endParaRPr lang="en-US" sz="1750" dirty="0"/>
-          </a:p>
-        </p:txBody>
-      </p:sp>
-      <p:pic>
-        <p:nvPicPr>
-          <p:cNvPr id="9" name="Image 1" descr="preencoded.png"/>
-          <p:cNvPicPr>
-            <a:picLocks noChangeAspect="1"/>
-          </p:cNvPicPr>
-          <p:nvPr/>
-        </p:nvPicPr>
-        <p:blipFill>
-          <a:blip r:embed="rId4"/>
-          <a:stretch>
-            <a:fillRect/>
-          </a:stretch>
-        </p:blipFill>
-        <p:spPr>
-          <a:xfrm>
-            <a:off x="5032653" y="2413516"/>
-            <a:ext cx="4564975" cy="4564975"/>
-          </a:xfrm>
-          <a:prstGeom prst="rect">
-            <a:avLst/>
-          </a:prstGeom>
-        </p:spPr>
-      </p:pic>
-      <p:sp>
-        <p:nvSpPr>
-          <p:cNvPr id="10" name="Text 6"/>
-          <p:cNvSpPr/>
-          <p:nvPr/>
-        </p:nvSpPr>
-        <p:spPr>
-          <a:xfrm>
-            <a:off x="8452604" y="3565088"/>
-            <a:ext cx="339328" cy="424220"/>
-          </a:xfrm>
-          <a:prstGeom prst="rect">
-            <a:avLst/>
-          </a:prstGeom>
-          <a:noFill/>
-          <a:ln/>
-        </p:spPr>
-        <p:txBody>
-          <a:bodyPr wrap="none" lIns="0" tIns="0" rIns="0" bIns="0" rtlCol="0" anchor="t"/>
-          <a:lstStyle/>
-          <a:p>
-            <a:pPr marL="0" indent="0" algn="l">
-              <a:lnSpc>
-                <a:spcPts val="4250"/>
-              </a:lnSpc>
-              <a:buNone/>
-            </a:pPr>
-            <a:r>
-              <a:rPr lang="en-US" sz="2650" dirty="0">
-                <a:solidFill>
-                  <a:srgbClr val="3C3939"/>
-                </a:solidFill>
-                <a:latin typeface="Raleway" pitchFamily="34" charset="0"/>
-                <a:ea typeface="Raleway" pitchFamily="34" charset="-122"/>
-                <a:cs typeface="Raleway" pitchFamily="34" charset="-120"/>
-              </a:rPr>
-              <a:t>2</a:t>
-            </a:r>
-            <a:endParaRPr lang="en-US" sz="2650" dirty="0"/>
-          </a:p>
-        </p:txBody>
-      </p:sp>
-      <p:sp>
-        <p:nvSpPr>
-          <p:cNvPr id="11" name="Text 7"/>
-          <p:cNvSpPr/>
-          <p:nvPr/>
-        </p:nvSpPr>
-        <p:spPr>
-          <a:xfrm>
-            <a:off x="9937790" y="5043249"/>
-            <a:ext cx="2874883" cy="354330"/>
-          </a:xfrm>
-          <a:prstGeom prst="rect">
-            <a:avLst/>
-          </a:prstGeom>
-          <a:noFill/>
-          <a:ln/>
-        </p:spPr>
-        <p:txBody>
-          <a:bodyPr wrap="none" lIns="0" tIns="0" rIns="0" bIns="0" rtlCol="0" anchor="t"/>
-          <a:lstStyle/>
-          <a:p>
-            <a:pPr marL="0" indent="0" algn="l">
-              <a:lnSpc>
-                <a:spcPts val="2750"/>
-              </a:lnSpc>
-              <a:buNone/>
-            </a:pPr>
-            <a:r>
-              <a:rPr lang="en-US" sz="2200" dirty="0">
-                <a:solidFill>
-                  <a:srgbClr val="3C3939"/>
-                </a:solidFill>
-                <a:latin typeface="Raleway" pitchFamily="34" charset="0"/>
-                <a:ea typeface="Raleway" pitchFamily="34" charset="-122"/>
-                <a:cs typeface="Raleway" pitchFamily="34" charset="-120"/>
-              </a:rPr>
-              <a:t>Conditional Retraining</a:t>
-            </a:r>
-            <a:endParaRPr lang="en-US" sz="2200" dirty="0"/>
-          </a:p>
-        </p:txBody>
-      </p:sp>
-      <p:sp>
-        <p:nvSpPr>
-          <p:cNvPr id="12" name="Text 8"/>
-          <p:cNvSpPr/>
-          <p:nvPr/>
-        </p:nvSpPr>
-        <p:spPr>
-          <a:xfrm>
-            <a:off x="9937790" y="5533668"/>
-            <a:ext cx="3898821" cy="1451610"/>
-          </a:xfrm>
-          <a:prstGeom prst="rect">
-            <a:avLst/>
-          </a:prstGeom>
-          <a:noFill/>
-          <a:ln/>
-        </p:spPr>
-        <p:txBody>
-          <a:bodyPr wrap="square" lIns="0" tIns="0" rIns="0" bIns="0" rtlCol="0" anchor="t"/>
-          <a:lstStyle/>
-          <a:p>
-            <a:pPr marL="0" indent="0" algn="l">
-              <a:lnSpc>
-                <a:spcPts val="2850"/>
-              </a:lnSpc>
-              <a:buNone/>
-            </a:pPr>
-            <a:r>
-              <a:rPr lang="en-US" sz="1750" dirty="0">
-                <a:solidFill>
-                  <a:srgbClr val="3C3939"/>
-                </a:solidFill>
-                <a:latin typeface="Roboto" pitchFamily="34" charset="0"/>
-                <a:ea typeface="Roboto" pitchFamily="34" charset="-122"/>
-                <a:cs typeface="Roboto" pitchFamily="34" charset="-120"/>
-              </a:rPr>
-              <a:t>If the detected drift </a:t>
-            </a:r>
-            <a:r>
-              <a:rPr lang="en-US" sz="1750" b="1" dirty="0">
-                <a:solidFill>
-                  <a:srgbClr val="3C3939"/>
-                </a:solidFill>
-                <a:latin typeface="Roboto" pitchFamily="34" charset="0"/>
-                <a:ea typeface="Roboto" pitchFamily="34" charset="-122"/>
-                <a:cs typeface="Roboto" pitchFamily="34" charset="-120"/>
-              </a:rPr>
-              <a:t>exceeds a predefined threshold</a:t>
-            </a:r>
-            <a:r>
-              <a:rPr lang="en-US" sz="1750" dirty="0">
-                <a:solidFill>
-                  <a:srgbClr val="3C3939"/>
-                </a:solidFill>
-                <a:latin typeface="Roboto" pitchFamily="34" charset="0"/>
-                <a:ea typeface="Roboto" pitchFamily="34" charset="-122"/>
-                <a:cs typeface="Roboto" pitchFamily="34" charset="-120"/>
-              </a:rPr>
-              <a:t>, the Airflow DAG automatically initiates the model retraining pipeline.</a:t>
-            </a:r>
-            <a:endParaRPr lang="en-US" sz="1750" dirty="0"/>
-          </a:p>
-        </p:txBody>
-      </p:sp>
-      <p:pic>
-        <p:nvPicPr>
-          <p:cNvPr id="13" name="Image 2" descr="preencoded.png"/>
-          <p:cNvPicPr>
-            <a:picLocks noChangeAspect="1"/>
-          </p:cNvPicPr>
-          <p:nvPr/>
-        </p:nvPicPr>
-        <p:blipFill>
-          <a:blip r:embed="rId5"/>
-          <a:stretch>
-            <a:fillRect/>
-          </a:stretch>
-        </p:blipFill>
-        <p:spPr>
-          <a:xfrm>
-            <a:off x="5032653" y="2413516"/>
-            <a:ext cx="4564975" cy="4564975"/>
-          </a:xfrm>
-          <a:prstGeom prst="rect">
-            <a:avLst/>
-          </a:prstGeom>
-        </p:spPr>
-      </p:pic>
-      <p:sp>
-        <p:nvSpPr>
-          <p:cNvPr id="14" name="Text 9"/>
-          <p:cNvSpPr/>
-          <p:nvPr/>
-        </p:nvSpPr>
-        <p:spPr>
-          <a:xfrm>
-            <a:off x="8064103" y="5790962"/>
-            <a:ext cx="339328" cy="424220"/>
-          </a:xfrm>
-          <a:prstGeom prst="rect">
-            <a:avLst/>
-          </a:prstGeom>
-          <a:noFill/>
-          <a:ln/>
-        </p:spPr>
-        <p:txBody>
-          <a:bodyPr wrap="none" lIns="0" tIns="0" rIns="0" bIns="0" rtlCol="0" anchor="t"/>
-          <a:lstStyle/>
-          <a:p>
-            <a:pPr marL="0" indent="0" algn="l">
-              <a:lnSpc>
-                <a:spcPts val="4250"/>
-              </a:lnSpc>
-              <a:buNone/>
-            </a:pPr>
-            <a:r>
-              <a:rPr lang="en-US" sz="2650" dirty="0">
-                <a:solidFill>
-                  <a:srgbClr val="3C3939"/>
-                </a:solidFill>
-                <a:latin typeface="Raleway" pitchFamily="34" charset="0"/>
-                <a:ea typeface="Raleway" pitchFamily="34" charset="-122"/>
-                <a:cs typeface="Raleway" pitchFamily="34" charset="-120"/>
-              </a:rPr>
-              <a:t>3</a:t>
-            </a:r>
-            <a:endParaRPr lang="en-US" sz="2650" dirty="0"/>
-          </a:p>
-        </p:txBody>
-      </p:sp>
-      <p:sp>
-        <p:nvSpPr>
-          <p:cNvPr id="15" name="Text 10"/>
-          <p:cNvSpPr/>
-          <p:nvPr/>
-        </p:nvSpPr>
-        <p:spPr>
-          <a:xfrm>
-            <a:off x="1205032" y="4861798"/>
-            <a:ext cx="3487460" cy="354330"/>
-          </a:xfrm>
-          <a:prstGeom prst="rect">
-            <a:avLst/>
-          </a:prstGeom>
-          <a:noFill/>
-          <a:ln/>
-        </p:spPr>
-        <p:txBody>
-          <a:bodyPr wrap="none" lIns="0" tIns="0" rIns="0" bIns="0" rtlCol="0" anchor="t"/>
-          <a:lstStyle/>
-          <a:p>
-            <a:pPr marL="0" indent="0" algn="r">
-              <a:lnSpc>
-                <a:spcPts val="2750"/>
-              </a:lnSpc>
-              <a:buNone/>
-            </a:pPr>
-            <a:r>
-              <a:rPr lang="en-US" sz="2200" dirty="0">
-                <a:solidFill>
-                  <a:srgbClr val="3C3939"/>
-                </a:solidFill>
-                <a:latin typeface="Raleway" pitchFamily="34" charset="0"/>
-                <a:ea typeface="Raleway" pitchFamily="34" charset="-122"/>
-                <a:cs typeface="Raleway" pitchFamily="34" charset="-120"/>
-              </a:rPr>
-              <a:t>Ensuring Model Relevance</a:t>
-            </a:r>
-            <a:endParaRPr lang="en-US" sz="2200" dirty="0"/>
-          </a:p>
-        </p:txBody>
-      </p:sp>
-      <p:sp>
-        <p:nvSpPr>
-          <p:cNvPr id="16" name="Text 11"/>
-          <p:cNvSpPr/>
-          <p:nvPr/>
-        </p:nvSpPr>
-        <p:spPr>
-          <a:xfrm>
-            <a:off x="793790" y="5352217"/>
-            <a:ext cx="3898702" cy="1814513"/>
-          </a:xfrm>
-          <a:prstGeom prst="rect">
-            <a:avLst/>
-          </a:prstGeom>
-          <a:noFill/>
-          <a:ln/>
-        </p:spPr>
-        <p:txBody>
-          <a:bodyPr wrap="square" lIns="0" tIns="0" rIns="0" bIns="0" rtlCol="0" anchor="t"/>
-          <a:lstStyle/>
-          <a:p>
-            <a:pPr marL="0" indent="0" algn="r">
-              <a:lnSpc>
-                <a:spcPts val="2850"/>
-              </a:lnSpc>
-              <a:buNone/>
-            </a:pPr>
-            <a:r>
-              <a:rPr lang="en-US" sz="1750" dirty="0">
-                <a:solidFill>
-                  <a:srgbClr val="3C3939"/>
-                </a:solidFill>
-                <a:latin typeface="Roboto" pitchFamily="34" charset="0"/>
-                <a:ea typeface="Roboto" pitchFamily="34" charset="-122"/>
-                <a:cs typeface="Roboto" pitchFamily="34" charset="-120"/>
-              </a:rPr>
-              <a:t>This automated system guarantees that our predictive model remains </a:t>
-            </a:r>
-            <a:r>
-              <a:rPr lang="en-US" sz="1750" b="1" dirty="0">
-                <a:solidFill>
-                  <a:srgbClr val="3C3939"/>
-                </a:solidFill>
-                <a:latin typeface="Roboto" pitchFamily="34" charset="0"/>
-                <a:ea typeface="Roboto" pitchFamily="34" charset="-122"/>
-                <a:cs typeface="Roboto" pitchFamily="34" charset="-120"/>
-              </a:rPr>
-              <a:t>accurate and relevant</a:t>
-            </a:r>
-            <a:r>
-              <a:rPr lang="en-US" sz="1750" dirty="0">
-                <a:solidFill>
-                  <a:srgbClr val="3C3939"/>
-                </a:solidFill>
-                <a:latin typeface="Roboto" pitchFamily="34" charset="0"/>
-                <a:ea typeface="Roboto" pitchFamily="34" charset="-122"/>
-                <a:cs typeface="Roboto" pitchFamily="34" charset="-120"/>
-              </a:rPr>
-              <a:t> as underlying lead behaviors and market conditions evolve.</a:t>
-            </a:r>
-            <a:endParaRPr lang="en-US" sz="1750" dirty="0"/>
-          </a:p>
-        </p:txBody>
-      </p:sp>
-      <p:pic>
-        <p:nvPicPr>
-          <p:cNvPr id="17" name="Image 3" descr="preencoded.png"/>
-          <p:cNvPicPr>
-            <a:picLocks noChangeAspect="1"/>
-          </p:cNvPicPr>
-          <p:nvPr/>
-        </p:nvPicPr>
-        <p:blipFill>
-          <a:blip r:embed="rId6"/>
-          <a:stretch>
-            <a:fillRect/>
-          </a:stretch>
-        </p:blipFill>
-        <p:spPr>
-          <a:xfrm>
-            <a:off x="5032653" y="2413516"/>
-            <a:ext cx="4564975" cy="4564975"/>
-          </a:xfrm>
-          <a:prstGeom prst="rect">
-            <a:avLst/>
-          </a:prstGeom>
-        </p:spPr>
-      </p:pic>
-      <p:sp>
-        <p:nvSpPr>
-          <p:cNvPr id="18" name="Text 12"/>
-          <p:cNvSpPr/>
-          <p:nvPr/>
-        </p:nvSpPr>
-        <p:spPr>
-          <a:xfrm>
-            <a:off x="5838230" y="5402461"/>
-            <a:ext cx="339328" cy="424220"/>
-          </a:xfrm>
-          <a:prstGeom prst="rect">
-            <a:avLst/>
-          </a:prstGeom>
-          <a:noFill/>
-          <a:ln/>
-        </p:spPr>
-        <p:txBody>
-          <a:bodyPr wrap="none" lIns="0" tIns="0" rIns="0" bIns="0" rtlCol="0" anchor="t"/>
-          <a:lstStyle/>
-          <a:p>
-            <a:pPr marL="0" indent="0" algn="l">
-              <a:lnSpc>
-                <a:spcPts val="4250"/>
-              </a:lnSpc>
-              <a:buNone/>
-            </a:pPr>
-            <a:r>
-              <a:rPr lang="en-US" sz="2650" dirty="0">
-                <a:solidFill>
-                  <a:srgbClr val="3C3939"/>
-                </a:solidFill>
-                <a:latin typeface="Raleway" pitchFamily="34" charset="0"/>
-                <a:ea typeface="Raleway" pitchFamily="34" charset="-122"/>
-                <a:cs typeface="Raleway" pitchFamily="34" charset="-120"/>
-              </a:rPr>
-              <a:t>4</a:t>
-            </a:r>
-            <a:endParaRPr lang="en-US" sz="2650" dirty="0"/>
-          </a:p>
-        </p:txBody>
-      </p:sp>
-      <p:pic>
-        <p:nvPicPr>
-          <p:cNvPr id="19" name="Picture 18">
-            <a:extLst>
-              <a:ext uri="{FF2B5EF4-FFF2-40B4-BE49-F238E27FC236}">
-                <a16:creationId xmlns:a16="http://schemas.microsoft.com/office/drawing/2014/main" id="{10A7490B-470D-78FE-3B8A-DCC6C4451E92}"/>
-              </a:ext>
-            </a:extLst>
-          </p:cNvPr>
-          <p:cNvPicPr>
-            <a:picLocks noChangeAspect="1"/>
-          </p:cNvPicPr>
-          <p:nvPr/>
-        </p:nvPicPr>
-        <p:blipFill>
-          <a:blip r:embed="rId7"/>
-          <a:stretch>
-            <a:fillRect/>
-          </a:stretch>
-        </p:blipFill>
-        <p:spPr>
-          <a:xfrm>
-            <a:off x="12316342" y="7790107"/>
-            <a:ext cx="2314058" cy="385676"/>
+            <a:off x="5116445" y="0"/>
+            <a:ext cx="5985677" cy="8229600"/>
           </a:xfrm>
           <a:prstGeom prst="rect">
             <a:avLst/>
